--- a/exports/pptx/lessons/senior-module-08-yoga/day-06-polyvagal.pptx
+++ b/exports/pptx/lessons/senior-module-08-yoga/day-06-polyvagal.pptx
@@ -16,9 +16,13 @@
     <p:sldId id="264" r:id="rId10"/>
     <p:sldId id="265" r:id="rId11"/>
     <p:sldId id="266" r:id="rId12"/>
+    <p:sldId id="267" r:id="rId13"/>
+    <p:sldId id="268" r:id="rId14"/>
+    <p:sldId id="269" r:id="rId15"/>
+    <p:sldId id="270" r:id="rId16"/>
   </p:sldIdLst>
   <p:notesMasterIdLst>
-    <p:notesMasterId r:id="rId13"/>
+    <p:notesMasterId r:id="rId17"/>
   </p:notesMasterIdLst>
   <p:sldSz cx="9144000" cy="5143500"/>
   <p:notesSz cx="5143500" cy="9144000"/>
@@ -712,6 +716,358 @@
             <a:fld id="{F7021451-1387-4CA6-816F-3879F97B5CBC}" type="slidenum">
               <a:rPr lang="en-US"/>
               <a:t>11</a:t>
+            </a:fld>
+            <a:endParaRPr lang="en-US"/>
+          </a:p>
+        </p:txBody>
+      </p:sp>
+    </p:spTree>
+    <p:extLst>
+      <p:ext uri="{BB962C8B-B14F-4D97-AF65-F5344CB8AC3E}">
+        <p14:creationId xmlns:p14="http://schemas.microsoft.com/office/powerpoint/2010/main" val="1024086991"/>
+      </p:ext>
+    </p:extLst>
+  </p:cSld>
+  <p:clrMapOvr>
+    <a:masterClrMapping/>
+  </p:clrMapOvr>
+</p:notes>
+</file>
+
+<file path=ppt/notesSlides/notesSlide12.xml><?xml version="1.0" encoding="utf-8"?>
+<p:notes xmlns:a="http://schemas.openxmlformats.org/drawingml/2006/main" xmlns:r="http://schemas.openxmlformats.org/officeDocument/2006/relationships" xmlns:p="http://schemas.openxmlformats.org/presentationml/2006/main">
+  <p:cSld>
+    <p:spTree>
+      <p:nvGrpSpPr>
+        <p:cNvPr id="1" name=""/>
+        <p:cNvGrpSpPr/>
+        <p:nvPr/>
+      </p:nvGrpSpPr>
+      <p:grpSpPr>
+        <a:xfrm>
+          <a:off x="0" y="0"/>
+          <a:ext cx="0" cy="0"/>
+          <a:chOff x="0" y="0"/>
+          <a:chExt cx="0" cy="0"/>
+        </a:xfrm>
+      </p:grpSpPr>
+      <p:sp>
+        <p:nvSpPr>
+          <p:cNvPr id="2" name="Slide Image Placeholder 1"/>
+          <p:cNvSpPr>
+            <a:spLocks noGrp="1" noRot="1" noChangeAspect="1"/>
+          </p:cNvSpPr>
+          <p:nvPr>
+            <p:ph type="sldImg"/>
+          </p:nvPr>
+        </p:nvSpPr>
+        <p:spPr/>
+      </p:sp>
+      <p:sp>
+        <p:nvSpPr>
+          <p:cNvPr id="3" name="Notes Placeholder 2"/>
+          <p:cNvSpPr>
+            <a:spLocks noGrp="1"/>
+          </p:cNvSpPr>
+          <p:nvPr>
+            <p:ph type="body" idx="1"/>
+          </p:nvPr>
+        </p:nvSpPr>
+        <p:spPr/>
+        <p:txBody>
+          <a:bodyPr/>
+          <a:lstStyle/>
+          <a:p>
+            <a:r>
+              <a:rPr lang="en-US" dirty="0"/>
+              <a:t/>
+            </a:r>
+            <a:endParaRPr lang="en-US" dirty="0"/>
+          </a:p>
+        </p:txBody>
+      </p:sp>
+      <p:sp>
+        <p:nvSpPr>
+          <p:cNvPr id="4" name="Slide Number Placeholder 3"/>
+          <p:cNvSpPr>
+            <a:spLocks noGrp="1"/>
+          </p:cNvSpPr>
+          <p:nvPr>
+            <p:ph type="sldNum" sz="quarter" idx="10"/>
+          </p:nvPr>
+        </p:nvSpPr>
+        <p:spPr/>
+        <p:txBody>
+          <a:bodyPr/>
+          <a:lstStyle/>
+          <a:p>
+            <a:fld id="{F7021451-1387-4CA6-816F-3879F97B5CBC}" type="slidenum">
+              <a:rPr lang="en-US"/>
+              <a:t>12</a:t>
+            </a:fld>
+            <a:endParaRPr lang="en-US"/>
+          </a:p>
+        </p:txBody>
+      </p:sp>
+    </p:spTree>
+    <p:extLst>
+      <p:ext uri="{BB962C8B-B14F-4D97-AF65-F5344CB8AC3E}">
+        <p14:creationId xmlns:p14="http://schemas.microsoft.com/office/powerpoint/2010/main" val="1024086991"/>
+      </p:ext>
+    </p:extLst>
+  </p:cSld>
+  <p:clrMapOvr>
+    <a:masterClrMapping/>
+  </p:clrMapOvr>
+</p:notes>
+</file>
+
+<file path=ppt/notesSlides/notesSlide13.xml><?xml version="1.0" encoding="utf-8"?>
+<p:notes xmlns:a="http://schemas.openxmlformats.org/drawingml/2006/main" xmlns:r="http://schemas.openxmlformats.org/officeDocument/2006/relationships" xmlns:p="http://schemas.openxmlformats.org/presentationml/2006/main">
+  <p:cSld>
+    <p:spTree>
+      <p:nvGrpSpPr>
+        <p:cNvPr id="1" name=""/>
+        <p:cNvGrpSpPr/>
+        <p:nvPr/>
+      </p:nvGrpSpPr>
+      <p:grpSpPr>
+        <a:xfrm>
+          <a:off x="0" y="0"/>
+          <a:ext cx="0" cy="0"/>
+          <a:chOff x="0" y="0"/>
+          <a:chExt cx="0" cy="0"/>
+        </a:xfrm>
+      </p:grpSpPr>
+      <p:sp>
+        <p:nvSpPr>
+          <p:cNvPr id="2" name="Slide Image Placeholder 1"/>
+          <p:cNvSpPr>
+            <a:spLocks noGrp="1" noRot="1" noChangeAspect="1"/>
+          </p:cNvSpPr>
+          <p:nvPr>
+            <p:ph type="sldImg"/>
+          </p:nvPr>
+        </p:nvSpPr>
+        <p:spPr/>
+      </p:sp>
+      <p:sp>
+        <p:nvSpPr>
+          <p:cNvPr id="3" name="Notes Placeholder 2"/>
+          <p:cNvSpPr>
+            <a:spLocks noGrp="1"/>
+          </p:cNvSpPr>
+          <p:nvPr>
+            <p:ph type="body" idx="1"/>
+          </p:nvPr>
+        </p:nvSpPr>
+        <p:spPr/>
+        <p:txBody>
+          <a:bodyPr/>
+          <a:lstStyle/>
+          <a:p>
+            <a:r>
+              <a:rPr lang="en-US" dirty="0"/>
+              <a:t/>
+            </a:r>
+            <a:endParaRPr lang="en-US" dirty="0"/>
+          </a:p>
+        </p:txBody>
+      </p:sp>
+      <p:sp>
+        <p:nvSpPr>
+          <p:cNvPr id="4" name="Slide Number Placeholder 3"/>
+          <p:cNvSpPr>
+            <a:spLocks noGrp="1"/>
+          </p:cNvSpPr>
+          <p:nvPr>
+            <p:ph type="sldNum" sz="quarter" idx="10"/>
+          </p:nvPr>
+        </p:nvSpPr>
+        <p:spPr/>
+        <p:txBody>
+          <a:bodyPr/>
+          <a:lstStyle/>
+          <a:p>
+            <a:fld id="{F7021451-1387-4CA6-816F-3879F97B5CBC}" type="slidenum">
+              <a:rPr lang="en-US"/>
+              <a:t>13</a:t>
+            </a:fld>
+            <a:endParaRPr lang="en-US"/>
+          </a:p>
+        </p:txBody>
+      </p:sp>
+    </p:spTree>
+    <p:extLst>
+      <p:ext uri="{BB962C8B-B14F-4D97-AF65-F5344CB8AC3E}">
+        <p14:creationId xmlns:p14="http://schemas.microsoft.com/office/powerpoint/2010/main" val="1024086991"/>
+      </p:ext>
+    </p:extLst>
+  </p:cSld>
+  <p:clrMapOvr>
+    <a:masterClrMapping/>
+  </p:clrMapOvr>
+</p:notes>
+</file>
+
+<file path=ppt/notesSlides/notesSlide14.xml><?xml version="1.0" encoding="utf-8"?>
+<p:notes xmlns:a="http://schemas.openxmlformats.org/drawingml/2006/main" xmlns:r="http://schemas.openxmlformats.org/officeDocument/2006/relationships" xmlns:p="http://schemas.openxmlformats.org/presentationml/2006/main">
+  <p:cSld>
+    <p:spTree>
+      <p:nvGrpSpPr>
+        <p:cNvPr id="1" name=""/>
+        <p:cNvGrpSpPr/>
+        <p:nvPr/>
+      </p:nvGrpSpPr>
+      <p:grpSpPr>
+        <a:xfrm>
+          <a:off x="0" y="0"/>
+          <a:ext cx="0" cy="0"/>
+          <a:chOff x="0" y="0"/>
+          <a:chExt cx="0" cy="0"/>
+        </a:xfrm>
+      </p:grpSpPr>
+      <p:sp>
+        <p:nvSpPr>
+          <p:cNvPr id="2" name="Slide Image Placeholder 1"/>
+          <p:cNvSpPr>
+            <a:spLocks noGrp="1" noRot="1" noChangeAspect="1"/>
+          </p:cNvSpPr>
+          <p:nvPr>
+            <p:ph type="sldImg"/>
+          </p:nvPr>
+        </p:nvSpPr>
+        <p:spPr/>
+      </p:sp>
+      <p:sp>
+        <p:nvSpPr>
+          <p:cNvPr id="3" name="Notes Placeholder 2"/>
+          <p:cNvSpPr>
+            <a:spLocks noGrp="1"/>
+          </p:cNvSpPr>
+          <p:nvPr>
+            <p:ph type="body" idx="1"/>
+          </p:nvPr>
+        </p:nvSpPr>
+        <p:spPr/>
+        <p:txBody>
+          <a:bodyPr/>
+          <a:lstStyle/>
+          <a:p>
+            <a:r>
+              <a:rPr lang="en-US" dirty="0"/>
+              <a:t/>
+            </a:r>
+            <a:endParaRPr lang="en-US" dirty="0"/>
+          </a:p>
+        </p:txBody>
+      </p:sp>
+      <p:sp>
+        <p:nvSpPr>
+          <p:cNvPr id="4" name="Slide Number Placeholder 3"/>
+          <p:cNvSpPr>
+            <a:spLocks noGrp="1"/>
+          </p:cNvSpPr>
+          <p:nvPr>
+            <p:ph type="sldNum" sz="quarter" idx="10"/>
+          </p:nvPr>
+        </p:nvSpPr>
+        <p:spPr/>
+        <p:txBody>
+          <a:bodyPr/>
+          <a:lstStyle/>
+          <a:p>
+            <a:fld id="{F7021451-1387-4CA6-816F-3879F97B5CBC}" type="slidenum">
+              <a:rPr lang="en-US"/>
+              <a:t>14</a:t>
+            </a:fld>
+            <a:endParaRPr lang="en-US"/>
+          </a:p>
+        </p:txBody>
+      </p:sp>
+    </p:spTree>
+    <p:extLst>
+      <p:ext uri="{BB962C8B-B14F-4D97-AF65-F5344CB8AC3E}">
+        <p14:creationId xmlns:p14="http://schemas.microsoft.com/office/powerpoint/2010/main" val="1024086991"/>
+      </p:ext>
+    </p:extLst>
+  </p:cSld>
+  <p:clrMapOvr>
+    <a:masterClrMapping/>
+  </p:clrMapOvr>
+</p:notes>
+</file>
+
+<file path=ppt/notesSlides/notesSlide15.xml><?xml version="1.0" encoding="utf-8"?>
+<p:notes xmlns:a="http://schemas.openxmlformats.org/drawingml/2006/main" xmlns:r="http://schemas.openxmlformats.org/officeDocument/2006/relationships" xmlns:p="http://schemas.openxmlformats.org/presentationml/2006/main">
+  <p:cSld>
+    <p:spTree>
+      <p:nvGrpSpPr>
+        <p:cNvPr id="1" name=""/>
+        <p:cNvGrpSpPr/>
+        <p:nvPr/>
+      </p:nvGrpSpPr>
+      <p:grpSpPr>
+        <a:xfrm>
+          <a:off x="0" y="0"/>
+          <a:ext cx="0" cy="0"/>
+          <a:chOff x="0" y="0"/>
+          <a:chExt cx="0" cy="0"/>
+        </a:xfrm>
+      </p:grpSpPr>
+      <p:sp>
+        <p:nvSpPr>
+          <p:cNvPr id="2" name="Slide Image Placeholder 1"/>
+          <p:cNvSpPr>
+            <a:spLocks noGrp="1" noRot="1" noChangeAspect="1"/>
+          </p:cNvSpPr>
+          <p:nvPr>
+            <p:ph type="sldImg"/>
+          </p:nvPr>
+        </p:nvSpPr>
+        <p:spPr/>
+      </p:sp>
+      <p:sp>
+        <p:nvSpPr>
+          <p:cNvPr id="3" name="Notes Placeholder 2"/>
+          <p:cNvSpPr>
+            <a:spLocks noGrp="1"/>
+          </p:cNvSpPr>
+          <p:nvPr>
+            <p:ph type="body" idx="1"/>
+          </p:nvPr>
+        </p:nvSpPr>
+        <p:spPr/>
+        <p:txBody>
+          <a:bodyPr/>
+          <a:lstStyle/>
+          <a:p>
+            <a:r>
+              <a:rPr lang="en-US" dirty="0"/>
+              <a:t/>
+            </a:r>
+            <a:endParaRPr lang="en-US" dirty="0"/>
+          </a:p>
+        </p:txBody>
+      </p:sp>
+      <p:sp>
+        <p:nvSpPr>
+          <p:cNvPr id="4" name="Slide Number Placeholder 3"/>
+          <p:cNvSpPr>
+            <a:spLocks noGrp="1"/>
+          </p:cNvSpPr>
+          <p:nvPr>
+            <p:ph type="sldNum" sz="quarter" idx="10"/>
+          </p:nvPr>
+        </p:nvSpPr>
+        <p:spPr/>
+        <p:txBody>
+          <a:bodyPr/>
+          <a:lstStyle/>
+          <a:p>
+            <a:fld id="{F7021451-1387-4CA6-816F-3879F97B5CBC}" type="slidenum">
+              <a:rPr lang="en-US"/>
+              <a:t>15</a:t>
             </a:fld>
             <a:endParaRPr lang="en-US"/>
           </a:p>
@@ -1965,102 +2321,6 @@
         </p:nvSpPr>
         <p:spPr>
           <a:xfrm>
-            <a:off x="406301" y="1223963"/>
-            <a:ext cx="8498026" cy="274290"/>
-          </a:xfrm>
-          <a:prstGeom prst="rect">
-            <a:avLst/>
-          </a:prstGeom>
-          <a:noFill/>
-          <a:ln/>
-        </p:spPr>
-        <p:txBody>
-          <a:bodyPr wrap="square" lIns="0" tIns="0" rIns="0" bIns="0" rtlCol="0" anchor="t"/>
-          <a:lstStyle/>
-          <a:p>
-            <a:pPr algn="l" indent="0" marL="0">
-              <a:lnSpc>
-                <a:spcPts val="2160"/>
-              </a:lnSpc>
-              <a:spcBef>
-                <a:spcPts val="600"/>
-              </a:spcBef>
-              <a:spcAft>
-                <a:spcPts val="800"/>
-              </a:spcAft>
-              <a:buNone/>
-            </a:pPr>
-            <a:r>
-              <a:rPr lang="en-US" sz="1800" b="1" dirty="0">
-                <a:solidFill>
-                  <a:srgbClr val="997929"/>
-                </a:solidFill>
-                <a:latin typeface="Times New Roman" pitchFamily="34" charset="0"/>
-                <a:ea typeface="Times New Roman" pitchFamily="34" charset="-122"/>
-                <a:cs typeface="Times New Roman" pitchFamily="34" charset="-120"/>
-              </a:rPr>
-              <a:t>Learning objective</a:t>
-            </a:r>
-            <a:endParaRPr lang="en-US" sz="1800" dirty="0"/>
-          </a:p>
-        </p:txBody>
-      </p:sp>
-      <p:sp>
-        <p:nvSpPr>
-          <p:cNvPr id="6" name="Text 4"/>
-          <p:cNvSpPr/>
-          <p:nvPr/>
-        </p:nvSpPr>
-        <p:spPr>
-          <a:xfrm>
-            <a:off x="406301" y="1637854"/>
-            <a:ext cx="8498026" cy="426541"/>
-          </a:xfrm>
-          <a:prstGeom prst="rect">
-            <a:avLst/>
-          </a:prstGeom>
-          <a:noFill/>
-          <a:ln/>
-        </p:spPr>
-        <p:txBody>
-          <a:bodyPr wrap="square" lIns="0" tIns="0" rIns="0" bIns="0" rtlCol="0" anchor="t"/>
-          <a:lstStyle/>
-          <a:p>
-            <a:pPr algn="l" indent="0" marL="0">
-              <a:lnSpc>
-                <a:spcPts val="1680"/>
-              </a:lnSpc>
-              <a:spcBef>
-                <a:spcPts val="300"/>
-              </a:spcBef>
-              <a:spcAft>
-                <a:spcPts val="300"/>
-              </a:spcAft>
-              <a:buNone/>
-            </a:pPr>
-            <a:r>
-              <a:rPr lang="en-US" sz="1200" dirty="0">
-                <a:solidFill>
-                  <a:srgbClr val="1A1A1A"/>
-                </a:solidFill>
-                <a:latin typeface="Georgia" pitchFamily="34" charset="0"/>
-                <a:ea typeface="Georgia" pitchFamily="34" charset="-122"/>
-                <a:cs typeface="Georgia" pitchFamily="34" charset="-120"/>
-              </a:rPr>
-              <a:t>Students read Porges (2009) and articulate the polyvagal-theory framing of how yoga practices affect the autonomic nervous system.</a:t>
-            </a:r>
-            <a:endParaRPr lang="en-US" sz="1200" dirty="0"/>
-          </a:p>
-        </p:txBody>
-      </p:sp>
-      <p:sp>
-        <p:nvSpPr>
-          <p:cNvPr id="7" name="Text 5"/>
-          <p:cNvSpPr/>
-          <p:nvPr/>
-        </p:nvSpPr>
-        <p:spPr>
-          <a:xfrm>
             <a:off x="406301" y="4434929"/>
             <a:ext cx="8498026" cy="213271"/>
           </a:xfrm>
@@ -2205,7 +2465,7 @@
                 <a:ea typeface="Times New Roman" pitchFamily="34" charset="-122"/>
                 <a:cs typeface="Times New Roman" pitchFamily="34" charset="-120"/>
               </a:rPr>
-              <a:t>Teacher notes</a:t>
+              <a:t>Core discussion (15 min) (cont.)</a:t>
             </a:r>
             <a:endParaRPr lang="en-US" sz="1800" dirty="0"/>
           </a:p>
@@ -2219,8 +2479,8 @@
         </p:nvSpPr>
         <p:spPr>
           <a:xfrm>
-            <a:off x="406301" y="870942"/>
-            <a:ext cx="8498026" cy="426541"/>
+            <a:off x="634901" y="883593"/>
+            <a:ext cx="8102798" cy="281880"/>
           </a:xfrm>
           <a:prstGeom prst="rect">
             <a:avLst/>
@@ -2232,17 +2492,61 @@
           <a:bodyPr wrap="square" lIns="0" tIns="0" rIns="0" bIns="0" rtlCol="0" anchor="t"/>
           <a:lstStyle/>
           <a:p>
-            <a:pPr algn="l" indent="0" marL="0">
-              <a:lnSpc>
-                <a:spcPts val="1680"/>
-              </a:lnSpc>
-              <a:spcBef>
-                <a:spcPts val="300"/>
-              </a:spcBef>
-              <a:spcAft>
-                <a:spcPts val="300"/>
-              </a:spcAft>
-              <a:buNone/>
+            <a:pPr algn="l" marL="342900" indent="-342900">
+              <a:lnSpc>
+                <a:spcPts val="1620"/>
+              </a:lnSpc>
+              <a:spcAft>
+                <a:spcPts val="300"/>
+              </a:spcAft>
+              <a:buSzPct val="100000"/>
+              <a:buChar char="•"/>
+            </a:pPr>
+            <a:r>
+              <a:rPr lang="en-US" sz="1200" b="1" dirty="0">
+                <a:solidFill>
+                  <a:srgbClr val="1A1A1A"/>
+                </a:solidFill>
+                <a:latin typeface="Georgia" pitchFamily="34" charset="0"/>
+                <a:ea typeface="Georgia" pitchFamily="34" charset="-122"/>
+                <a:cs typeface="Georgia" pitchFamily="34" charset="-120"/>
+              </a:rPr>
+              <a:t>Limits and critiques.</a:t>
+            </a:r>
+            <a:endParaRPr lang="en-US" sz="1200" dirty="0"/>
+          </a:p>
+        </p:txBody>
+      </p:sp>
+      <p:sp>
+        <p:nvSpPr>
+          <p:cNvPr id="5" name="Text 3"/>
+          <p:cNvSpPr/>
+          <p:nvPr/>
+        </p:nvSpPr>
+        <p:spPr>
+          <a:xfrm>
+            <a:off x="634901" y="1266974"/>
+            <a:ext cx="8102798" cy="731341"/>
+          </a:xfrm>
+          <a:prstGeom prst="rect">
+            <a:avLst/>
+          </a:prstGeom>
+          <a:noFill/>
+          <a:ln/>
+        </p:spPr>
+        <p:txBody>
+          <a:bodyPr wrap="square" lIns="0" tIns="0" rIns="0" bIns="0" rtlCol="0" anchor="t"/>
+          <a:lstStyle/>
+          <a:p>
+            <a:pPr algn="l" marL="342900" indent="-342900">
+              <a:lnSpc>
+                <a:spcPts val="1620"/>
+              </a:lnSpc>
+              <a:spcAft>
+                <a:spcPts val="300"/>
+              </a:spcAft>
+              <a:buSzPct val="100000"/>
+              <a:buChar char="•"/>
             </a:pPr>
             <a:r>
               <a:rPr lang="en-US" sz="1200" dirty="0">
@@ -2253,42 +2557,20 @@
                 <a:ea typeface="Georgia" pitchFamily="34" charset="-122"/>
                 <a:cs typeface="Georgia" pitchFamily="34" charset="-120"/>
               </a:rPr>
-              <a:t>– The polyvagal framework is currently popular in wellness circles. It is </a:t>
-            </a:r>
-            <a:pPr algn="l" indent="0" marL="0">
-              <a:lnSpc>
-                <a:spcPts val="1680"/>
-              </a:lnSpc>
-              <a:spcBef>
-                <a:spcPts val="300"/>
-              </a:spcBef>
-              <a:spcAft>
-                <a:spcPts val="300"/>
-              </a:spcAft>
-              <a:buNone/>
-            </a:pPr>
-            <a:r>
-              <a:rPr lang="en-US" sz="1200" i="1" dirty="0">
-                <a:solidFill>
-                  <a:srgbClr val="1A1A1A"/>
-                </a:solidFill>
-                <a:latin typeface="Georgia" pitchFamily="34" charset="0"/>
-                <a:ea typeface="Georgia" pitchFamily="34" charset="-122"/>
-                <a:cs typeface="Georgia" pitchFamily="34" charset="-120"/>
-              </a:rPr>
-              <a:t>defensible</a:t>
-            </a:r>
-            <a:pPr algn="l" indent="0" marL="0">
-              <a:lnSpc>
-                <a:spcPts val="1680"/>
-              </a:lnSpc>
-              <a:spcBef>
-                <a:spcPts val="300"/>
-              </a:spcBef>
-              <a:spcAft>
-                <a:spcPts val="300"/>
-              </a:spcAft>
-              <a:buNone/>
+              <a:t>Porges's theory has critics — Grossman &amp; Taylor (2007) and others dispute specific claims about vagal physiology.</a:t>
+            </a:r>
+            <a:endParaRPr lang="en-US" sz="1200" dirty="0"/>
+          </a:p>
+          <a:p>
+            <a:pPr algn="l" marL="342900" indent="-342900">
+              <a:lnSpc>
+                <a:spcPts val="1620"/>
+              </a:lnSpc>
+              <a:spcAft>
+                <a:spcPts val="300"/>
+              </a:spcAft>
+              <a:buSzPct val="100000"/>
+              <a:buChar char="•"/>
             </a:pPr>
             <a:r>
               <a:rPr lang="en-US" sz="1200" dirty="0">
@@ -2299,53 +2581,7 @@
                 <a:ea typeface="Georgia" pitchFamily="34" charset="-122"/>
                 <a:cs typeface="Georgia" pitchFamily="34" charset="-120"/>
               </a:rPr>
-              <a:t> but not </a:t>
-            </a:r>
-            <a:pPr algn="l" indent="0" marL="0">
-              <a:lnSpc>
-                <a:spcPts val="1680"/>
-              </a:lnSpc>
-              <a:spcBef>
-                <a:spcPts val="300"/>
-              </a:spcBef>
-              <a:spcAft>
-                <a:spcPts val="300"/>
-              </a:spcAft>
-              <a:buNone/>
-            </a:pPr>
-            <a:r>
-              <a:rPr lang="en-US" sz="1200" i="1" dirty="0">
-                <a:solidFill>
-                  <a:srgbClr val="1A1A1A"/>
-                </a:solidFill>
-                <a:latin typeface="Georgia" pitchFamily="34" charset="0"/>
-                <a:ea typeface="Georgia" pitchFamily="34" charset="-122"/>
-                <a:cs typeface="Georgia" pitchFamily="34" charset="-120"/>
-              </a:rPr>
-              <a:t>settled</a:t>
-            </a:r>
-            <a:pPr algn="l" indent="0" marL="0">
-              <a:lnSpc>
-                <a:spcPts val="1680"/>
-              </a:lnSpc>
-              <a:spcBef>
-                <a:spcPts val="300"/>
-              </a:spcBef>
-              <a:spcAft>
-                <a:spcPts val="300"/>
-              </a:spcAft>
-              <a:buNone/>
-            </a:pPr>
-            <a:r>
-              <a:rPr lang="en-US" sz="1200" dirty="0">
-                <a:solidFill>
-                  <a:srgbClr val="1A1A1A"/>
-                </a:solidFill>
-                <a:latin typeface="Georgia" pitchFamily="34" charset="0"/>
-                <a:ea typeface="Georgia" pitchFamily="34" charset="-122"/>
-                <a:cs typeface="Georgia" pitchFamily="34" charset="-120"/>
-              </a:rPr>
-              <a:t>. Help students engage it as one framework, not as proof.</a:t>
+              <a:t>The cleanest claim that survives: slow exhalation IS associated with parasympathetic activation (whether or not the polyvagal three-tier model is fully correct).</a:t>
             </a:r>
             <a:endParaRPr lang="en-US" sz="1200" dirty="0"/>
           </a:p>
@@ -2353,7 +2589,7 @@
       </p:sp>
       <p:sp>
         <p:nvSpPr>
-          <p:cNvPr id="5" name="Text 3"/>
+          <p:cNvPr id="6" name="Text 4"/>
           <p:cNvSpPr/>
           <p:nvPr/>
         </p:nvSpPr>
@@ -2503,7 +2739,7 @@
                 <a:ea typeface="Times New Roman" pitchFamily="34" charset="-122"/>
                 <a:cs typeface="Times New Roman" pitchFamily="34" charset="-120"/>
               </a:rPr>
-              <a:t>Citation(s) used</a:t>
+              <a:t>Practice (8 min) — Test the theory</a:t>
             </a:r>
             <a:endParaRPr lang="en-US" sz="1800" dirty="0"/>
           </a:p>
@@ -2517,8 +2753,8 @@
         </p:nvSpPr>
         <p:spPr>
           <a:xfrm>
-            <a:off x="406301" y="870942"/>
-            <a:ext cx="8498026" cy="213271"/>
+            <a:off x="634901" y="883593"/>
+            <a:ext cx="8102798" cy="769441"/>
           </a:xfrm>
           <a:prstGeom prst="rect">
             <a:avLst/>
@@ -2530,17 +2766,15 @@
           <a:bodyPr wrap="square" lIns="0" tIns="0" rIns="0" bIns="0" rtlCol="0" anchor="t"/>
           <a:lstStyle/>
           <a:p>
-            <a:pPr algn="l" indent="0" marL="0">
-              <a:lnSpc>
-                <a:spcPts val="1680"/>
-              </a:lnSpc>
-              <a:spcBef>
-                <a:spcPts val="300"/>
-              </a:spcBef>
-              <a:spcAft>
-                <a:spcPts val="300"/>
-              </a:spcAft>
-              <a:buNone/>
+            <a:pPr algn="l" marL="342900" indent="-342900">
+              <a:lnSpc>
+                <a:spcPts val="1620"/>
+              </a:lnSpc>
+              <a:spcAft>
+                <a:spcPts val="300"/>
+              </a:spcAft>
+              <a:buSzPct val="100000"/>
+              <a:buChar char="•"/>
             </a:pPr>
             <a:r>
               <a:rPr lang="en-US" sz="1200" dirty="0">
@@ -2551,30 +2785,55 @@
                 <a:ea typeface="Georgia" pitchFamily="34" charset="-122"/>
                 <a:cs typeface="Georgia" pitchFamily="34" charset="-120"/>
               </a:rPr>
-              <a:t>– Porges, S. W. (2009). "The polyvagal theory." </a:t>
-            </a:r>
-            <a:pPr algn="l" indent="0" marL="0">
-              <a:lnSpc>
-                <a:spcPts val="1680"/>
-              </a:lnSpc>
-              <a:spcBef>
-                <a:spcPts val="300"/>
-              </a:spcBef>
-              <a:spcAft>
-                <a:spcPts val="300"/>
-              </a:spcAft>
-              <a:buNone/>
-            </a:pPr>
-            <a:r>
-              <a:rPr lang="en-US" sz="1200" i="1" dirty="0">
-                <a:solidFill>
-                  <a:srgbClr val="1A1A1A"/>
-                </a:solidFill>
-                <a:latin typeface="Georgia" pitchFamily="34" charset="0"/>
-                <a:ea typeface="Georgia" pitchFamily="34" charset="-122"/>
-                <a:cs typeface="Georgia" pitchFamily="34" charset="-120"/>
-              </a:rPr>
-              <a:t>Cleveland Clinic Journal of Medicine.</a:t>
+              <a:t>1 min sukhāsana, natural breath, count heart rate (carotid pulse if comfortable).</a:t>
+            </a:r>
+            <a:endParaRPr lang="en-US" sz="1200" dirty="0"/>
+          </a:p>
+          <a:p>
+            <a:pPr algn="l" marL="342900" indent="-342900">
+              <a:lnSpc>
+                <a:spcPts val="1620"/>
+              </a:lnSpc>
+              <a:spcAft>
+                <a:spcPts val="300"/>
+              </a:spcAft>
+              <a:buSzPct val="100000"/>
+              <a:buChar char="•"/>
+            </a:pPr>
+            <a:r>
+              <a:rPr lang="en-US" sz="1200" dirty="0">
+                <a:solidFill>
+                  <a:srgbClr val="1A1A1A"/>
+                </a:solidFill>
+                <a:latin typeface="Georgia" pitchFamily="34" charset="0"/>
+                <a:ea typeface="Georgia" pitchFamily="34" charset="-122"/>
+                <a:cs typeface="Georgia" pitchFamily="34" charset="-120"/>
+              </a:rPr>
+              <a:t>5 min counted breath (4 in, 4 out).</a:t>
+            </a:r>
+            <a:endParaRPr lang="en-US" sz="1200" dirty="0"/>
+          </a:p>
+          <a:p>
+            <a:pPr algn="l" marL="342900" indent="-342900">
+              <a:lnSpc>
+                <a:spcPts val="1620"/>
+              </a:lnSpc>
+              <a:spcAft>
+                <a:spcPts val="300"/>
+              </a:spcAft>
+              <a:buSzPct val="100000"/>
+              <a:buChar char="•"/>
+            </a:pPr>
+            <a:r>
+              <a:rPr lang="en-US" sz="1200" dirty="0">
+                <a:solidFill>
+                  <a:srgbClr val="1A1A1A"/>
+                </a:solidFill>
+                <a:latin typeface="Georgia" pitchFamily="34" charset="0"/>
+                <a:ea typeface="Georgia" pitchFamily="34" charset="-122"/>
+                <a:cs typeface="Georgia" pitchFamily="34" charset="-120"/>
+              </a:rPr>
+              <a:t>1 min sukhāsana, count heart rate again.</a:t>
             </a:r>
             <a:endParaRPr lang="en-US" sz="1200" dirty="0"/>
           </a:p>
@@ -2588,8 +2847,8 @@
         </p:nvSpPr>
         <p:spPr>
           <a:xfrm>
-            <a:off x="634901" y="1173063"/>
-            <a:ext cx="8102798" cy="281880"/>
+            <a:off x="406301" y="1741884"/>
+            <a:ext cx="8498026" cy="426541"/>
           </a:xfrm>
           <a:prstGeom prst="rect">
             <a:avLst/>
@@ -2601,6 +2860,258 @@
           <a:bodyPr wrap="square" lIns="0" tIns="0" rIns="0" bIns="0" rtlCol="0" anchor="t"/>
           <a:lstStyle/>
           <a:p>
+            <a:pPr algn="l" indent="0" marL="0">
+              <a:lnSpc>
+                <a:spcPts val="1680"/>
+              </a:lnSpc>
+              <a:spcBef>
+                <a:spcPts val="300"/>
+              </a:spcBef>
+              <a:spcAft>
+                <a:spcPts val="300"/>
+              </a:spcAft>
+              <a:buNone/>
+            </a:pPr>
+            <a:r>
+              <a:rPr lang="en-US" sz="1200" dirty="0">
+                <a:solidFill>
+                  <a:srgbClr val="1A1A1A"/>
+                </a:solidFill>
+                <a:latin typeface="Georgia" pitchFamily="34" charset="0"/>
+                <a:ea typeface="Georgia" pitchFamily="34" charset="-122"/>
+                <a:cs typeface="Georgia" pitchFamily="34" charset="-120"/>
+              </a:rPr>
+              <a:t>Did anything change? (Most students notice a slight slowing. The N=1 anecdote doesn't prove anything, but it lets students </a:t>
+            </a:r>
+            <a:pPr algn="l" indent="0" marL="0">
+              <a:lnSpc>
+                <a:spcPts val="1680"/>
+              </a:lnSpc>
+              <a:spcBef>
+                <a:spcPts val="300"/>
+              </a:spcBef>
+              <a:spcAft>
+                <a:spcPts val="300"/>
+              </a:spcAft>
+              <a:buNone/>
+            </a:pPr>
+            <a:r>
+              <a:rPr lang="en-US" sz="1200" i="1" dirty="0">
+                <a:solidFill>
+                  <a:srgbClr val="1A1A1A"/>
+                </a:solidFill>
+                <a:latin typeface="Georgia" pitchFamily="34" charset="0"/>
+                <a:ea typeface="Georgia" pitchFamily="34" charset="-122"/>
+                <a:cs typeface="Georgia" pitchFamily="34" charset="-120"/>
+              </a:rPr>
+              <a:t>feel</a:t>
+            </a:r>
+            <a:pPr algn="l" indent="0" marL="0">
+              <a:lnSpc>
+                <a:spcPts val="1680"/>
+              </a:lnSpc>
+              <a:spcBef>
+                <a:spcPts val="300"/>
+              </a:spcBef>
+              <a:spcAft>
+                <a:spcPts val="300"/>
+              </a:spcAft>
+              <a:buNone/>
+            </a:pPr>
+            <a:r>
+              <a:rPr lang="en-US" sz="1200" dirty="0">
+                <a:solidFill>
+                  <a:srgbClr val="1A1A1A"/>
+                </a:solidFill>
+                <a:latin typeface="Georgia" pitchFamily="34" charset="0"/>
+                <a:ea typeface="Georgia" pitchFamily="34" charset="-122"/>
+                <a:cs typeface="Georgia" pitchFamily="34" charset="-120"/>
+              </a:rPr>
+              <a:t> the principle.)</a:t>
+            </a:r>
+            <a:endParaRPr lang="en-US" sz="1200" dirty="0"/>
+          </a:p>
+        </p:txBody>
+      </p:sp>
+      <p:sp>
+        <p:nvSpPr>
+          <p:cNvPr id="6" name="Text 4"/>
+          <p:cNvSpPr/>
+          <p:nvPr/>
+        </p:nvSpPr>
+        <p:spPr>
+          <a:xfrm>
+            <a:off x="406301" y="4434929"/>
+            <a:ext cx="8498026" cy="213271"/>
+          </a:xfrm>
+          <a:prstGeom prst="rect">
+            <a:avLst/>
+          </a:prstGeom>
+          <a:noFill/>
+          <a:ln/>
+        </p:spPr>
+        <p:txBody>
+          <a:bodyPr wrap="square" lIns="0" tIns="0" rIns="0" bIns="0" rtlCol="0" anchor="t"/>
+          <a:lstStyle/>
+          <a:p>
+            <a:pPr algn="l" indent="0" marL="0">
+              <a:lnSpc>
+                <a:spcPts val="1680"/>
+              </a:lnSpc>
+              <a:spcBef>
+                <a:spcPts val="300"/>
+              </a:spcBef>
+              <a:spcAft>
+                <a:spcPts val="300"/>
+              </a:spcAft>
+              <a:buNone/>
+            </a:pPr>
+            <a:r>
+              <a:rPr lang="en-US" sz="1200" dirty="0">
+                <a:solidFill>
+                  <a:srgbClr val="1A1A1A"/>
+                </a:solidFill>
+                <a:latin typeface="Georgia" pitchFamily="34" charset="0"/>
+                <a:ea typeface="Georgia" pitchFamily="34" charset="-122"/>
+                <a:cs typeface="Georgia" pitchFamily="34" charset="-120"/>
+              </a:rPr>
+              <a:t>Senior ·  · IKS Curriculum</a:t>
+            </a:r>
+            <a:endParaRPr lang="en-US" sz="1200" dirty="0"/>
+          </a:p>
+        </p:txBody>
+      </p:sp>
+    </p:spTree>
+  </p:cSld>
+  <p:clrMapOvr>
+    <a:masterClrMapping/>
+  </p:clrMapOvr>
+</p:sld>
+</file>
+
+<file path=ppt/slides/slide12.xml><?xml version="1.0" encoding="utf-8"?>
+<p:sld xmlns:a="http://schemas.openxmlformats.org/drawingml/2006/main" xmlns:r="http://schemas.openxmlformats.org/officeDocument/2006/relationships" xmlns:p="http://schemas.openxmlformats.org/presentationml/2006/main">
+  <p:cSld name="Slide 12">
+    <p:bg>
+      <p:bgPr>
+        <a:solidFill>
+          <a:srgbClr val="FAF7F2"/>
+        </a:solidFill>
+      </p:bgPr>
+    </p:bg>
+    <p:spTree>
+      <p:nvGrpSpPr>
+        <p:cNvPr id="1" name=""/>
+        <p:cNvGrpSpPr/>
+        <p:nvPr/>
+      </p:nvGrpSpPr>
+      <p:grpSpPr>
+        <a:xfrm>
+          <a:off x="0" y="0"/>
+          <a:ext cx="0" cy="0"/>
+          <a:chOff x="0" y="0"/>
+          <a:chExt cx="0" cy="0"/>
+        </a:xfrm>
+      </p:grpSpPr>
+      <p:sp>
+        <p:nvSpPr>
+          <p:cNvPr id="2" name="Text 0"/>
+          <p:cNvSpPr/>
+          <p:nvPr/>
+        </p:nvSpPr>
+        <p:spPr>
+          <a:xfrm>
+            <a:off x="0" y="0"/>
+            <a:ext cx="9144000" cy="101501"/>
+          </a:xfrm>
+          <a:prstGeom prst="rect">
+            <a:avLst/>
+          </a:prstGeom>
+          <a:solidFill>
+            <a:srgbClr val="5D1D2E"/>
+          </a:solidFill>
+          <a:ln/>
+        </p:spPr>
+        <p:txBody>
+          <a:bodyPr wrap="square" rtlCol="0" anchor="ctr"/>
+          <a:lstStyle/>
+          <a:p>
+            <a:pPr indent="0" marL="0">
+              <a:buNone/>
+            </a:pPr>
+            <a:endParaRPr lang="en-US" dirty="0"/>
+          </a:p>
+        </p:txBody>
+      </p:sp>
+      <p:sp>
+        <p:nvSpPr>
+          <p:cNvPr id="3" name="Text 1"/>
+          <p:cNvSpPr/>
+          <p:nvPr/>
+        </p:nvSpPr>
+        <p:spPr>
+          <a:xfrm>
+            <a:off x="406301" y="457051"/>
+            <a:ext cx="8498026" cy="274290"/>
+          </a:xfrm>
+          <a:prstGeom prst="rect">
+            <a:avLst/>
+          </a:prstGeom>
+          <a:noFill/>
+          <a:ln/>
+        </p:spPr>
+        <p:txBody>
+          <a:bodyPr wrap="square" lIns="0" tIns="0" rIns="0" bIns="0" rtlCol="0" anchor="t"/>
+          <a:lstStyle/>
+          <a:p>
+            <a:pPr algn="l" indent="0" marL="0">
+              <a:lnSpc>
+                <a:spcPts val="2160"/>
+              </a:lnSpc>
+              <a:spcBef>
+                <a:spcPts val="600"/>
+              </a:spcBef>
+              <a:spcAft>
+                <a:spcPts val="800"/>
+              </a:spcAft>
+              <a:buNone/>
+            </a:pPr>
+            <a:r>
+              <a:rPr lang="en-US" sz="1800" b="1" dirty="0">
+                <a:solidFill>
+                  <a:srgbClr val="997929"/>
+                </a:solidFill>
+                <a:latin typeface="Times New Roman" pitchFamily="34" charset="0"/>
+                <a:ea typeface="Times New Roman" pitchFamily="34" charset="-122"/>
+                <a:cs typeface="Times New Roman" pitchFamily="34" charset="-120"/>
+              </a:rPr>
+              <a:t>Wrap-up (4 min)</a:t>
+            </a:r>
+            <a:endParaRPr lang="en-US" sz="1800" dirty="0"/>
+          </a:p>
+        </p:txBody>
+      </p:sp>
+      <p:sp>
+        <p:nvSpPr>
+          <p:cNvPr id="4" name="Text 2"/>
+          <p:cNvSpPr/>
+          <p:nvPr/>
+        </p:nvSpPr>
+        <p:spPr>
+          <a:xfrm>
+            <a:off x="634901" y="883593"/>
+            <a:ext cx="8102798" cy="525661"/>
+          </a:xfrm>
+          <a:prstGeom prst="rect">
+            <a:avLst/>
+          </a:prstGeom>
+          <a:noFill/>
+          <a:ln/>
+        </p:spPr>
+        <p:txBody>
+          <a:bodyPr wrap="square" lIns="0" tIns="0" rIns="0" bIns="0" rtlCol="0" anchor="t"/>
+          <a:lstStyle/>
+          <a:p>
             <a:pPr algn="l" marL="342900" indent="-342900">
               <a:lnSpc>
                 <a:spcPts val="1620"/>
@@ -2620,6 +3131,850 @@
                 <a:ea typeface="Georgia" pitchFamily="34" charset="-122"/>
                 <a:cs typeface="Georgia" pitchFamily="34" charset="-120"/>
               </a:rPr>
+              <a:t>2 students share their question from the reading.</a:t>
+            </a:r>
+            <a:endParaRPr lang="en-US" sz="1200" dirty="0"/>
+          </a:p>
+          <a:p>
+            <a:pPr algn="l" marL="342900" indent="-342900">
+              <a:lnSpc>
+                <a:spcPts val="1620"/>
+              </a:lnSpc>
+              <a:spcAft>
+                <a:spcPts val="300"/>
+              </a:spcAft>
+              <a:buSzPct val="100000"/>
+              <a:buChar char="•"/>
+            </a:pPr>
+            <a:r>
+              <a:rPr lang="en-US" sz="1200" dirty="0">
+                <a:solidFill>
+                  <a:srgbClr val="1A1A1A"/>
+                </a:solidFill>
+                <a:latin typeface="Georgia" pitchFamily="34" charset="0"/>
+                <a:ea typeface="Georgia" pitchFamily="34" charset="-122"/>
+                <a:cs typeface="Georgia" pitchFamily="34" charset="-120"/>
+              </a:rPr>
+              <a:t>Preview Day 7: </a:t>
+            </a:r>
+            <a:pPr algn="l" indent="0" marL="0">
+              <a:lnSpc>
+                <a:spcPts val="1620"/>
+              </a:lnSpc>
+              <a:spcAft>
+                <a:spcPts val="300"/>
+              </a:spcAft>
+              <a:buNone/>
+            </a:pPr>
+            <a:r>
+              <a:rPr lang="en-US" sz="1200" i="1" dirty="0">
+                <a:solidFill>
+                  <a:srgbClr val="1A1A1A"/>
+                </a:solidFill>
+                <a:latin typeface="Georgia" pitchFamily="34" charset="0"/>
+                <a:ea typeface="Georgia" pitchFamily="34" charset="-122"/>
+                <a:cs typeface="Georgia" pitchFamily="34" charset="-120"/>
+              </a:rPr>
+              <a:t>"Tomorrow — modern postural yoga's specific 20th-century lineage."</a:t>
+            </a:r>
+            <a:endParaRPr lang="en-US" sz="1200" dirty="0"/>
+          </a:p>
+        </p:txBody>
+      </p:sp>
+      <p:sp>
+        <p:nvSpPr>
+          <p:cNvPr id="5" name="Text 3"/>
+          <p:cNvSpPr/>
+          <p:nvPr/>
+        </p:nvSpPr>
+        <p:spPr>
+          <a:xfrm>
+            <a:off x="406301" y="4434929"/>
+            <a:ext cx="8498026" cy="213271"/>
+          </a:xfrm>
+          <a:prstGeom prst="rect">
+            <a:avLst/>
+          </a:prstGeom>
+          <a:noFill/>
+          <a:ln/>
+        </p:spPr>
+        <p:txBody>
+          <a:bodyPr wrap="square" lIns="0" tIns="0" rIns="0" bIns="0" rtlCol="0" anchor="t"/>
+          <a:lstStyle/>
+          <a:p>
+            <a:pPr algn="l" indent="0" marL="0">
+              <a:lnSpc>
+                <a:spcPts val="1680"/>
+              </a:lnSpc>
+              <a:spcBef>
+                <a:spcPts val="300"/>
+              </a:spcBef>
+              <a:spcAft>
+                <a:spcPts val="300"/>
+              </a:spcAft>
+              <a:buNone/>
+            </a:pPr>
+            <a:r>
+              <a:rPr lang="en-US" sz="1200" dirty="0">
+                <a:solidFill>
+                  <a:srgbClr val="1A1A1A"/>
+                </a:solidFill>
+                <a:latin typeface="Georgia" pitchFamily="34" charset="0"/>
+                <a:ea typeface="Georgia" pitchFamily="34" charset="-122"/>
+                <a:cs typeface="Georgia" pitchFamily="34" charset="-120"/>
+              </a:rPr>
+              <a:t>Senior ·  · IKS Curriculum</a:t>
+            </a:r>
+            <a:endParaRPr lang="en-US" sz="1200" dirty="0"/>
+          </a:p>
+        </p:txBody>
+      </p:sp>
+    </p:spTree>
+  </p:cSld>
+  <p:clrMapOvr>
+    <a:masterClrMapping/>
+  </p:clrMapOvr>
+</p:sld>
+</file>
+
+<file path=ppt/slides/slide13.xml><?xml version="1.0" encoding="utf-8"?>
+<p:sld xmlns:a="http://schemas.openxmlformats.org/drawingml/2006/main" xmlns:r="http://schemas.openxmlformats.org/officeDocument/2006/relationships" xmlns:p="http://schemas.openxmlformats.org/presentationml/2006/main">
+  <p:cSld name="Slide 13">
+    <p:bg>
+      <p:bgPr>
+        <a:solidFill>
+          <a:srgbClr val="FAF7F2"/>
+        </a:solidFill>
+      </p:bgPr>
+    </p:bg>
+    <p:spTree>
+      <p:nvGrpSpPr>
+        <p:cNvPr id="1" name=""/>
+        <p:cNvGrpSpPr/>
+        <p:nvPr/>
+      </p:nvGrpSpPr>
+      <p:grpSpPr>
+        <a:xfrm>
+          <a:off x="0" y="0"/>
+          <a:ext cx="0" cy="0"/>
+          <a:chOff x="0" y="0"/>
+          <a:chExt cx="0" cy="0"/>
+        </a:xfrm>
+      </p:grpSpPr>
+      <p:sp>
+        <p:nvSpPr>
+          <p:cNvPr id="2" name="Text 0"/>
+          <p:cNvSpPr/>
+          <p:nvPr/>
+        </p:nvSpPr>
+        <p:spPr>
+          <a:xfrm>
+            <a:off x="0" y="0"/>
+            <a:ext cx="9144000" cy="101501"/>
+          </a:xfrm>
+          <a:prstGeom prst="rect">
+            <a:avLst/>
+          </a:prstGeom>
+          <a:solidFill>
+            <a:srgbClr val="5D1D2E"/>
+          </a:solidFill>
+          <a:ln/>
+        </p:spPr>
+        <p:txBody>
+          <a:bodyPr wrap="square" rtlCol="0" anchor="ctr"/>
+          <a:lstStyle/>
+          <a:p>
+            <a:pPr indent="0" marL="0">
+              <a:buNone/>
+            </a:pPr>
+            <a:endParaRPr lang="en-US" dirty="0"/>
+          </a:p>
+        </p:txBody>
+      </p:sp>
+      <p:sp>
+        <p:nvSpPr>
+          <p:cNvPr id="3" name="Text 1"/>
+          <p:cNvSpPr/>
+          <p:nvPr/>
+        </p:nvSpPr>
+        <p:spPr>
+          <a:xfrm>
+            <a:off x="406301" y="457051"/>
+            <a:ext cx="8498026" cy="274290"/>
+          </a:xfrm>
+          <a:prstGeom prst="rect">
+            <a:avLst/>
+          </a:prstGeom>
+          <a:noFill/>
+          <a:ln/>
+        </p:spPr>
+        <p:txBody>
+          <a:bodyPr wrap="square" lIns="0" tIns="0" rIns="0" bIns="0" rtlCol="0" anchor="t"/>
+          <a:lstStyle/>
+          <a:p>
+            <a:pPr algn="l" indent="0" marL="0">
+              <a:lnSpc>
+                <a:spcPts val="2160"/>
+              </a:lnSpc>
+              <a:spcBef>
+                <a:spcPts val="600"/>
+              </a:spcBef>
+              <a:spcAft>
+                <a:spcPts val="800"/>
+              </a:spcAft>
+              <a:buNone/>
+            </a:pPr>
+            <a:r>
+              <a:rPr lang="en-US" sz="1800" b="1" dirty="0">
+                <a:solidFill>
+                  <a:srgbClr val="997929"/>
+                </a:solidFill>
+                <a:latin typeface="Times New Roman" pitchFamily="34" charset="0"/>
+                <a:ea typeface="Times New Roman" pitchFamily="34" charset="-122"/>
+                <a:cs typeface="Times New Roman" pitchFamily="34" charset="-120"/>
+              </a:rPr>
+              <a:t>Differentiation</a:t>
+            </a:r>
+            <a:endParaRPr lang="en-US" sz="1800" dirty="0"/>
+          </a:p>
+        </p:txBody>
+      </p:sp>
+      <p:sp>
+        <p:nvSpPr>
+          <p:cNvPr id="4" name="Text 2"/>
+          <p:cNvSpPr/>
+          <p:nvPr/>
+        </p:nvSpPr>
+        <p:spPr>
+          <a:xfrm>
+            <a:off x="634901" y="883593"/>
+            <a:ext cx="8102798" cy="525661"/>
+          </a:xfrm>
+          <a:prstGeom prst="rect">
+            <a:avLst/>
+          </a:prstGeom>
+          <a:noFill/>
+          <a:ln/>
+        </p:spPr>
+        <p:txBody>
+          <a:bodyPr wrap="square" lIns="0" tIns="0" rIns="0" bIns="0" rtlCol="0" anchor="t"/>
+          <a:lstStyle/>
+          <a:p>
+            <a:pPr algn="l" marL="342900" indent="-342900">
+              <a:lnSpc>
+                <a:spcPts val="1620"/>
+              </a:lnSpc>
+              <a:spcAft>
+                <a:spcPts val="300"/>
+              </a:spcAft>
+              <a:buSzPct val="100000"/>
+              <a:buChar char="•"/>
+            </a:pPr>
+            <a:r>
+              <a:rPr lang="en-US" sz="1200" b="1" dirty="0">
+                <a:solidFill>
+                  <a:srgbClr val="1A1A1A"/>
+                </a:solidFill>
+                <a:latin typeface="Georgia" pitchFamily="34" charset="0"/>
+                <a:ea typeface="Georgia" pitchFamily="34" charset="-122"/>
+                <a:cs typeface="Georgia" pitchFamily="34" charset="-120"/>
+              </a:rPr>
+              <a:t>Tier up:</a:t>
+            </a:r>
+            <a:pPr algn="l" indent="0" marL="0">
+              <a:lnSpc>
+                <a:spcPts val="1620"/>
+              </a:lnSpc>
+              <a:spcAft>
+                <a:spcPts val="300"/>
+              </a:spcAft>
+              <a:buNone/>
+            </a:pPr>
+            <a:r>
+              <a:rPr lang="en-US" sz="1200" dirty="0">
+                <a:solidFill>
+                  <a:srgbClr val="1A1A1A"/>
+                </a:solidFill>
+                <a:latin typeface="Georgia" pitchFamily="34" charset="0"/>
+                <a:ea typeface="Georgia" pitchFamily="34" charset="-122"/>
+                <a:cs typeface="Georgia" pitchFamily="34" charset="-120"/>
+              </a:rPr>
+              <a:t> Read the Grossman &amp; Taylor (2007) critique. Bring 1 specific objection to discuss.</a:t>
+            </a:r>
+            <a:endParaRPr lang="en-US" sz="1200" dirty="0"/>
+          </a:p>
+          <a:p>
+            <a:pPr algn="l" marL="342900" indent="-342900">
+              <a:lnSpc>
+                <a:spcPts val="1620"/>
+              </a:lnSpc>
+              <a:spcAft>
+                <a:spcPts val="300"/>
+              </a:spcAft>
+              <a:buSzPct val="100000"/>
+              <a:buChar char="•"/>
+            </a:pPr>
+            <a:r>
+              <a:rPr lang="en-US" sz="1200" b="1" dirty="0">
+                <a:solidFill>
+                  <a:srgbClr val="1A1A1A"/>
+                </a:solidFill>
+                <a:latin typeface="Georgia" pitchFamily="34" charset="0"/>
+                <a:ea typeface="Georgia" pitchFamily="34" charset="-122"/>
+                <a:cs typeface="Georgia" pitchFamily="34" charset="-120"/>
+              </a:rPr>
+              <a:t>Tier down:</a:t>
+            </a:r>
+            <a:pPr algn="l" indent="0" marL="0">
+              <a:lnSpc>
+                <a:spcPts val="1620"/>
+              </a:lnSpc>
+              <a:spcAft>
+                <a:spcPts val="300"/>
+              </a:spcAft>
+              <a:buNone/>
+            </a:pPr>
+            <a:r>
+              <a:rPr lang="en-US" sz="1200" dirty="0">
+                <a:solidFill>
+                  <a:srgbClr val="1A1A1A"/>
+                </a:solidFill>
+                <a:latin typeface="Georgia" pitchFamily="34" charset="0"/>
+                <a:ea typeface="Georgia" pitchFamily="34" charset="-122"/>
+                <a:cs typeface="Georgia" pitchFamily="34" charset="-120"/>
+              </a:rPr>
+              <a:t> Focus on the three-tier ANS framework; the polyvagal extensions can be supplementary.</a:t>
+            </a:r>
+            <a:endParaRPr lang="en-US" sz="1200" dirty="0"/>
+          </a:p>
+        </p:txBody>
+      </p:sp>
+      <p:sp>
+        <p:nvSpPr>
+          <p:cNvPr id="5" name="Text 3"/>
+          <p:cNvSpPr/>
+          <p:nvPr/>
+        </p:nvSpPr>
+        <p:spPr>
+          <a:xfrm>
+            <a:off x="406301" y="4434929"/>
+            <a:ext cx="8498026" cy="213271"/>
+          </a:xfrm>
+          <a:prstGeom prst="rect">
+            <a:avLst/>
+          </a:prstGeom>
+          <a:noFill/>
+          <a:ln/>
+        </p:spPr>
+        <p:txBody>
+          <a:bodyPr wrap="square" lIns="0" tIns="0" rIns="0" bIns="0" rtlCol="0" anchor="t"/>
+          <a:lstStyle/>
+          <a:p>
+            <a:pPr algn="l" indent="0" marL="0">
+              <a:lnSpc>
+                <a:spcPts val="1680"/>
+              </a:lnSpc>
+              <a:spcBef>
+                <a:spcPts val="300"/>
+              </a:spcBef>
+              <a:spcAft>
+                <a:spcPts val="300"/>
+              </a:spcAft>
+              <a:buNone/>
+            </a:pPr>
+            <a:r>
+              <a:rPr lang="en-US" sz="1200" dirty="0">
+                <a:solidFill>
+                  <a:srgbClr val="1A1A1A"/>
+                </a:solidFill>
+                <a:latin typeface="Georgia" pitchFamily="34" charset="0"/>
+                <a:ea typeface="Georgia" pitchFamily="34" charset="-122"/>
+                <a:cs typeface="Georgia" pitchFamily="34" charset="-120"/>
+              </a:rPr>
+              <a:t>Senior ·  · IKS Curriculum</a:t>
+            </a:r>
+            <a:endParaRPr lang="en-US" sz="1200" dirty="0"/>
+          </a:p>
+        </p:txBody>
+      </p:sp>
+    </p:spTree>
+  </p:cSld>
+  <p:clrMapOvr>
+    <a:masterClrMapping/>
+  </p:clrMapOvr>
+</p:sld>
+</file>
+
+<file path=ppt/slides/slide14.xml><?xml version="1.0" encoding="utf-8"?>
+<p:sld xmlns:a="http://schemas.openxmlformats.org/drawingml/2006/main" xmlns:r="http://schemas.openxmlformats.org/officeDocument/2006/relationships" xmlns:p="http://schemas.openxmlformats.org/presentationml/2006/main">
+  <p:cSld name="Slide 14">
+    <p:bg>
+      <p:bgPr>
+        <a:solidFill>
+          <a:srgbClr val="FAF7F2"/>
+        </a:solidFill>
+      </p:bgPr>
+    </p:bg>
+    <p:spTree>
+      <p:nvGrpSpPr>
+        <p:cNvPr id="1" name=""/>
+        <p:cNvGrpSpPr/>
+        <p:nvPr/>
+      </p:nvGrpSpPr>
+      <p:grpSpPr>
+        <a:xfrm>
+          <a:off x="0" y="0"/>
+          <a:ext cx="0" cy="0"/>
+          <a:chOff x="0" y="0"/>
+          <a:chExt cx="0" cy="0"/>
+        </a:xfrm>
+      </p:grpSpPr>
+      <p:sp>
+        <p:nvSpPr>
+          <p:cNvPr id="2" name="Text 0"/>
+          <p:cNvSpPr/>
+          <p:nvPr/>
+        </p:nvSpPr>
+        <p:spPr>
+          <a:xfrm>
+            <a:off x="0" y="0"/>
+            <a:ext cx="9144000" cy="101501"/>
+          </a:xfrm>
+          <a:prstGeom prst="rect">
+            <a:avLst/>
+          </a:prstGeom>
+          <a:solidFill>
+            <a:srgbClr val="5D1D2E"/>
+          </a:solidFill>
+          <a:ln/>
+        </p:spPr>
+        <p:txBody>
+          <a:bodyPr wrap="square" rtlCol="0" anchor="ctr"/>
+          <a:lstStyle/>
+          <a:p>
+            <a:pPr indent="0" marL="0">
+              <a:buNone/>
+            </a:pPr>
+            <a:endParaRPr lang="en-US" dirty="0"/>
+          </a:p>
+        </p:txBody>
+      </p:sp>
+      <p:sp>
+        <p:nvSpPr>
+          <p:cNvPr id="3" name="Text 1"/>
+          <p:cNvSpPr/>
+          <p:nvPr/>
+        </p:nvSpPr>
+        <p:spPr>
+          <a:xfrm>
+            <a:off x="406301" y="457051"/>
+            <a:ext cx="8498026" cy="274290"/>
+          </a:xfrm>
+          <a:prstGeom prst="rect">
+            <a:avLst/>
+          </a:prstGeom>
+          <a:noFill/>
+          <a:ln/>
+        </p:spPr>
+        <p:txBody>
+          <a:bodyPr wrap="square" lIns="0" tIns="0" rIns="0" bIns="0" rtlCol="0" anchor="t"/>
+          <a:lstStyle/>
+          <a:p>
+            <a:pPr algn="l" indent="0" marL="0">
+              <a:lnSpc>
+                <a:spcPts val="2160"/>
+              </a:lnSpc>
+              <a:spcBef>
+                <a:spcPts val="600"/>
+              </a:spcBef>
+              <a:spcAft>
+                <a:spcPts val="800"/>
+              </a:spcAft>
+              <a:buNone/>
+            </a:pPr>
+            <a:r>
+              <a:rPr lang="en-US" sz="1800" b="1" dirty="0">
+                <a:solidFill>
+                  <a:srgbClr val="997929"/>
+                </a:solidFill>
+                <a:latin typeface="Times New Roman" pitchFamily="34" charset="0"/>
+                <a:ea typeface="Times New Roman" pitchFamily="34" charset="-122"/>
+                <a:cs typeface="Times New Roman" pitchFamily="34" charset="-120"/>
+              </a:rPr>
+              <a:t>Teacher notes</a:t>
+            </a:r>
+            <a:endParaRPr lang="en-US" sz="1800" dirty="0"/>
+          </a:p>
+        </p:txBody>
+      </p:sp>
+      <p:sp>
+        <p:nvSpPr>
+          <p:cNvPr id="4" name="Text 2"/>
+          <p:cNvSpPr/>
+          <p:nvPr/>
+        </p:nvSpPr>
+        <p:spPr>
+          <a:xfrm>
+            <a:off x="634901" y="883593"/>
+            <a:ext cx="8102798" cy="487561"/>
+          </a:xfrm>
+          <a:prstGeom prst="rect">
+            <a:avLst/>
+          </a:prstGeom>
+          <a:noFill/>
+          <a:ln/>
+        </p:spPr>
+        <p:txBody>
+          <a:bodyPr wrap="square" lIns="0" tIns="0" rIns="0" bIns="0" rtlCol="0" anchor="t"/>
+          <a:lstStyle/>
+          <a:p>
+            <a:pPr algn="l" marL="342900" indent="-342900">
+              <a:lnSpc>
+                <a:spcPts val="1620"/>
+              </a:lnSpc>
+              <a:spcAft>
+                <a:spcPts val="300"/>
+              </a:spcAft>
+              <a:buSzPct val="100000"/>
+              <a:buChar char="•"/>
+            </a:pPr>
+            <a:r>
+              <a:rPr lang="en-US" sz="1200" dirty="0">
+                <a:solidFill>
+                  <a:srgbClr val="1A1A1A"/>
+                </a:solidFill>
+                <a:latin typeface="Georgia" pitchFamily="34" charset="0"/>
+                <a:ea typeface="Georgia" pitchFamily="34" charset="-122"/>
+                <a:cs typeface="Georgia" pitchFamily="34" charset="-120"/>
+              </a:rPr>
+              <a:t>The polyvagal framework is currently popular in wellness circles. It is </a:t>
+            </a:r>
+            <a:pPr algn="l" indent="0" marL="0">
+              <a:lnSpc>
+                <a:spcPts val="1620"/>
+              </a:lnSpc>
+              <a:spcAft>
+                <a:spcPts val="300"/>
+              </a:spcAft>
+              <a:buNone/>
+            </a:pPr>
+            <a:r>
+              <a:rPr lang="en-US" sz="1200" i="1" dirty="0">
+                <a:solidFill>
+                  <a:srgbClr val="1A1A1A"/>
+                </a:solidFill>
+                <a:latin typeface="Georgia" pitchFamily="34" charset="0"/>
+                <a:ea typeface="Georgia" pitchFamily="34" charset="-122"/>
+                <a:cs typeface="Georgia" pitchFamily="34" charset="-120"/>
+              </a:rPr>
+              <a:t>defensible</a:t>
+            </a:r>
+            <a:pPr algn="l" indent="0" marL="0">
+              <a:lnSpc>
+                <a:spcPts val="1620"/>
+              </a:lnSpc>
+              <a:spcAft>
+                <a:spcPts val="300"/>
+              </a:spcAft>
+              <a:buNone/>
+            </a:pPr>
+            <a:r>
+              <a:rPr lang="en-US" sz="1200" dirty="0">
+                <a:solidFill>
+                  <a:srgbClr val="1A1A1A"/>
+                </a:solidFill>
+                <a:latin typeface="Georgia" pitchFamily="34" charset="0"/>
+                <a:ea typeface="Georgia" pitchFamily="34" charset="-122"/>
+                <a:cs typeface="Georgia" pitchFamily="34" charset="-120"/>
+              </a:rPr>
+              <a:t> but not </a:t>
+            </a:r>
+            <a:pPr algn="l" indent="0" marL="0">
+              <a:lnSpc>
+                <a:spcPts val="1620"/>
+              </a:lnSpc>
+              <a:spcAft>
+                <a:spcPts val="300"/>
+              </a:spcAft>
+              <a:buNone/>
+            </a:pPr>
+            <a:r>
+              <a:rPr lang="en-US" sz="1200" i="1" dirty="0">
+                <a:solidFill>
+                  <a:srgbClr val="1A1A1A"/>
+                </a:solidFill>
+                <a:latin typeface="Georgia" pitchFamily="34" charset="0"/>
+                <a:ea typeface="Georgia" pitchFamily="34" charset="-122"/>
+                <a:cs typeface="Georgia" pitchFamily="34" charset="-120"/>
+              </a:rPr>
+              <a:t>settled</a:t>
+            </a:r>
+            <a:pPr algn="l" indent="0" marL="0">
+              <a:lnSpc>
+                <a:spcPts val="1620"/>
+              </a:lnSpc>
+              <a:spcAft>
+                <a:spcPts val="300"/>
+              </a:spcAft>
+              <a:buNone/>
+            </a:pPr>
+            <a:r>
+              <a:rPr lang="en-US" sz="1200" dirty="0">
+                <a:solidFill>
+                  <a:srgbClr val="1A1A1A"/>
+                </a:solidFill>
+                <a:latin typeface="Georgia" pitchFamily="34" charset="0"/>
+                <a:ea typeface="Georgia" pitchFamily="34" charset="-122"/>
+                <a:cs typeface="Georgia" pitchFamily="34" charset="-120"/>
+              </a:rPr>
+              <a:t>. Help students engage it as one framework, not as proof.</a:t>
+            </a:r>
+            <a:endParaRPr lang="en-US" sz="1200" dirty="0"/>
+          </a:p>
+        </p:txBody>
+      </p:sp>
+      <p:sp>
+        <p:nvSpPr>
+          <p:cNvPr id="5" name="Text 3"/>
+          <p:cNvSpPr/>
+          <p:nvPr/>
+        </p:nvSpPr>
+        <p:spPr>
+          <a:xfrm>
+            <a:off x="406301" y="4434929"/>
+            <a:ext cx="8498026" cy="213271"/>
+          </a:xfrm>
+          <a:prstGeom prst="rect">
+            <a:avLst/>
+          </a:prstGeom>
+          <a:noFill/>
+          <a:ln/>
+        </p:spPr>
+        <p:txBody>
+          <a:bodyPr wrap="square" lIns="0" tIns="0" rIns="0" bIns="0" rtlCol="0" anchor="t"/>
+          <a:lstStyle/>
+          <a:p>
+            <a:pPr algn="l" indent="0" marL="0">
+              <a:lnSpc>
+                <a:spcPts val="1680"/>
+              </a:lnSpc>
+              <a:spcBef>
+                <a:spcPts val="300"/>
+              </a:spcBef>
+              <a:spcAft>
+                <a:spcPts val="300"/>
+              </a:spcAft>
+              <a:buNone/>
+            </a:pPr>
+            <a:r>
+              <a:rPr lang="en-US" sz="1200" dirty="0">
+                <a:solidFill>
+                  <a:srgbClr val="1A1A1A"/>
+                </a:solidFill>
+                <a:latin typeface="Georgia" pitchFamily="34" charset="0"/>
+                <a:ea typeface="Georgia" pitchFamily="34" charset="-122"/>
+                <a:cs typeface="Georgia" pitchFamily="34" charset="-120"/>
+              </a:rPr>
+              <a:t>Senior ·  · IKS Curriculum</a:t>
+            </a:r>
+            <a:endParaRPr lang="en-US" sz="1200" dirty="0"/>
+          </a:p>
+        </p:txBody>
+      </p:sp>
+    </p:spTree>
+  </p:cSld>
+  <p:clrMapOvr>
+    <a:masterClrMapping/>
+  </p:clrMapOvr>
+</p:sld>
+</file>
+
+<file path=ppt/slides/slide15.xml><?xml version="1.0" encoding="utf-8"?>
+<p:sld xmlns:a="http://schemas.openxmlformats.org/drawingml/2006/main" xmlns:r="http://schemas.openxmlformats.org/officeDocument/2006/relationships" xmlns:p="http://schemas.openxmlformats.org/presentationml/2006/main">
+  <p:cSld name="Slide 15">
+    <p:bg>
+      <p:bgPr>
+        <a:solidFill>
+          <a:srgbClr val="FAF7F2"/>
+        </a:solidFill>
+      </p:bgPr>
+    </p:bg>
+    <p:spTree>
+      <p:nvGrpSpPr>
+        <p:cNvPr id="1" name=""/>
+        <p:cNvGrpSpPr/>
+        <p:nvPr/>
+      </p:nvGrpSpPr>
+      <p:grpSpPr>
+        <a:xfrm>
+          <a:off x="0" y="0"/>
+          <a:ext cx="0" cy="0"/>
+          <a:chOff x="0" y="0"/>
+          <a:chExt cx="0" cy="0"/>
+        </a:xfrm>
+      </p:grpSpPr>
+      <p:sp>
+        <p:nvSpPr>
+          <p:cNvPr id="2" name="Text 0"/>
+          <p:cNvSpPr/>
+          <p:nvPr/>
+        </p:nvSpPr>
+        <p:spPr>
+          <a:xfrm>
+            <a:off x="0" y="0"/>
+            <a:ext cx="9144000" cy="101501"/>
+          </a:xfrm>
+          <a:prstGeom prst="rect">
+            <a:avLst/>
+          </a:prstGeom>
+          <a:solidFill>
+            <a:srgbClr val="5D1D2E"/>
+          </a:solidFill>
+          <a:ln/>
+        </p:spPr>
+        <p:txBody>
+          <a:bodyPr wrap="square" rtlCol="0" anchor="ctr"/>
+          <a:lstStyle/>
+          <a:p>
+            <a:pPr indent="0" marL="0">
+              <a:buNone/>
+            </a:pPr>
+            <a:endParaRPr lang="en-US" dirty="0"/>
+          </a:p>
+        </p:txBody>
+      </p:sp>
+      <p:sp>
+        <p:nvSpPr>
+          <p:cNvPr id="3" name="Text 1"/>
+          <p:cNvSpPr/>
+          <p:nvPr/>
+        </p:nvSpPr>
+        <p:spPr>
+          <a:xfrm>
+            <a:off x="406301" y="457051"/>
+            <a:ext cx="8498026" cy="274290"/>
+          </a:xfrm>
+          <a:prstGeom prst="rect">
+            <a:avLst/>
+          </a:prstGeom>
+          <a:noFill/>
+          <a:ln/>
+        </p:spPr>
+        <p:txBody>
+          <a:bodyPr wrap="square" lIns="0" tIns="0" rIns="0" bIns="0" rtlCol="0" anchor="t"/>
+          <a:lstStyle/>
+          <a:p>
+            <a:pPr algn="l" indent="0" marL="0">
+              <a:lnSpc>
+                <a:spcPts val="2160"/>
+              </a:lnSpc>
+              <a:spcBef>
+                <a:spcPts val="600"/>
+              </a:spcBef>
+              <a:spcAft>
+                <a:spcPts val="800"/>
+              </a:spcAft>
+              <a:buNone/>
+            </a:pPr>
+            <a:r>
+              <a:rPr lang="en-US" sz="1800" b="1" dirty="0">
+                <a:solidFill>
+                  <a:srgbClr val="997929"/>
+                </a:solidFill>
+                <a:latin typeface="Times New Roman" pitchFamily="34" charset="0"/>
+                <a:ea typeface="Times New Roman" pitchFamily="34" charset="-122"/>
+                <a:cs typeface="Times New Roman" pitchFamily="34" charset="-120"/>
+              </a:rPr>
+              <a:t>Citation(s) used</a:t>
+            </a:r>
+            <a:endParaRPr lang="en-US" sz="1800" dirty="0"/>
+          </a:p>
+        </p:txBody>
+      </p:sp>
+      <p:sp>
+        <p:nvSpPr>
+          <p:cNvPr id="4" name="Text 2"/>
+          <p:cNvSpPr/>
+          <p:nvPr/>
+        </p:nvSpPr>
+        <p:spPr>
+          <a:xfrm>
+            <a:off x="634901" y="883593"/>
+            <a:ext cx="8102798" cy="525661"/>
+          </a:xfrm>
+          <a:prstGeom prst="rect">
+            <a:avLst/>
+          </a:prstGeom>
+          <a:noFill/>
+          <a:ln/>
+        </p:spPr>
+        <p:txBody>
+          <a:bodyPr wrap="square" lIns="0" tIns="0" rIns="0" bIns="0" rtlCol="0" anchor="t"/>
+          <a:lstStyle/>
+          <a:p>
+            <a:pPr algn="l" marL="342900" indent="-342900">
+              <a:lnSpc>
+                <a:spcPts val="1620"/>
+              </a:lnSpc>
+              <a:spcAft>
+                <a:spcPts val="300"/>
+              </a:spcAft>
+              <a:buSzPct val="100000"/>
+              <a:buChar char="•"/>
+            </a:pPr>
+            <a:r>
+              <a:rPr lang="en-US" sz="1200" dirty="0">
+                <a:solidFill>
+                  <a:srgbClr val="1A1A1A"/>
+                </a:solidFill>
+                <a:latin typeface="Georgia" pitchFamily="34" charset="0"/>
+                <a:ea typeface="Georgia" pitchFamily="34" charset="-122"/>
+                <a:cs typeface="Georgia" pitchFamily="34" charset="-120"/>
+              </a:rPr>
+              <a:t>Porges, S. W. (2009). "The polyvagal theory." </a:t>
+            </a:r>
+            <a:pPr algn="l" indent="0" marL="0">
+              <a:lnSpc>
+                <a:spcPts val="1620"/>
+              </a:lnSpc>
+              <a:spcAft>
+                <a:spcPts val="300"/>
+              </a:spcAft>
+              <a:buNone/>
+            </a:pPr>
+            <a:r>
+              <a:rPr lang="en-US" sz="1200" i="1" dirty="0">
+                <a:solidFill>
+                  <a:srgbClr val="1A1A1A"/>
+                </a:solidFill>
+                <a:latin typeface="Georgia" pitchFamily="34" charset="0"/>
+                <a:ea typeface="Georgia" pitchFamily="34" charset="-122"/>
+                <a:cs typeface="Georgia" pitchFamily="34" charset="-120"/>
+              </a:rPr>
+              <a:t>Cleveland Clinic Journal of Medicine.</a:t>
+            </a:r>
+            <a:endParaRPr lang="en-US" sz="1200" dirty="0"/>
+          </a:p>
+          <a:p>
+            <a:pPr algn="l" marL="342900" indent="-342900">
+              <a:lnSpc>
+                <a:spcPts val="1620"/>
+              </a:lnSpc>
+              <a:spcAft>
+                <a:spcPts val="300"/>
+              </a:spcAft>
+              <a:buSzPct val="100000"/>
+              <a:buChar char="•"/>
+            </a:pPr>
+            <a:r>
+              <a:rPr lang="en-US" sz="1200" dirty="0">
+                <a:solidFill>
+                  <a:srgbClr val="1A1A1A"/>
+                </a:solidFill>
+                <a:latin typeface="Georgia" pitchFamily="34" charset="0"/>
+                <a:ea typeface="Georgia" pitchFamily="34" charset="-122"/>
+                <a:cs typeface="Georgia" pitchFamily="34" charset="-120"/>
+              </a:rPr>
               <a:t>(Optional) Grossman &amp; Taylor (2007). </a:t>
             </a:r>
             <a:pPr algn="l" indent="0" marL="0">
@@ -2648,7 +4003,7 @@
       </p:sp>
       <p:sp>
         <p:nvSpPr>
-          <p:cNvPr id="6" name="Text 4"/>
+          <p:cNvPr id="5" name="Text 3"/>
           <p:cNvSpPr/>
           <p:nvPr/>
         </p:nvSpPr>
@@ -2798,7 +4153,7 @@
                 <a:ea typeface="Times New Roman" pitchFamily="34" charset="-122"/>
                 <a:cs typeface="Times New Roman" pitchFamily="34" charset="-120"/>
               </a:rPr>
-              <a:t>Materials</a:t>
+              <a:t>Learning objective</a:t>
             </a:r>
             <a:endParaRPr lang="en-US" sz="1800" dirty="0"/>
           </a:p>
@@ -2846,7 +4201,7 @@
                 <a:ea typeface="Georgia" pitchFamily="34" charset="-122"/>
                 <a:cs typeface="Georgia" pitchFamily="34" charset="-120"/>
               </a:rPr>
-              <a:t>– Mats – Printed Porges (2009) or teacher synopsis (1–2 pages) – Diagram of three-tier ANS (ventral vagal / sympathetic / dorsal vagal)</a:t>
+              <a:t>Students read Porges (2009) and articulate the polyvagal-theory framing of how yoga practices affect the autonomic nervous system.</a:t>
             </a:r>
             <a:endParaRPr lang="en-US" sz="1200" dirty="0"/>
           </a:p>
@@ -3004,7 +4359,7 @@
                 <a:ea typeface="Times New Roman" pitchFamily="34" charset="-122"/>
                 <a:cs typeface="Times New Roman" pitchFamily="34" charset="-120"/>
               </a:rPr>
-              <a:t>Flow</a:t>
+              <a:t>Materials</a:t>
             </a:r>
             <a:endParaRPr lang="en-US" sz="1800" dirty="0"/>
           </a:p>
@@ -3013,6 +4368,100 @@
       <p:sp>
         <p:nvSpPr>
           <p:cNvPr id="4" name="Text 2"/>
+          <p:cNvSpPr/>
+          <p:nvPr/>
+        </p:nvSpPr>
+        <p:spPr>
+          <a:xfrm>
+            <a:off x="634901" y="883593"/>
+            <a:ext cx="8102798" cy="769441"/>
+          </a:xfrm>
+          <a:prstGeom prst="rect">
+            <a:avLst/>
+          </a:prstGeom>
+          <a:noFill/>
+          <a:ln/>
+        </p:spPr>
+        <p:txBody>
+          <a:bodyPr wrap="square" lIns="0" tIns="0" rIns="0" bIns="0" rtlCol="0" anchor="t"/>
+          <a:lstStyle/>
+          <a:p>
+            <a:pPr algn="l" marL="342900" indent="-342900">
+              <a:lnSpc>
+                <a:spcPts val="1620"/>
+              </a:lnSpc>
+              <a:spcAft>
+                <a:spcPts val="300"/>
+              </a:spcAft>
+              <a:buSzPct val="100000"/>
+              <a:buChar char="•"/>
+            </a:pPr>
+            <a:r>
+              <a:rPr lang="en-US" sz="1200" dirty="0">
+                <a:solidFill>
+                  <a:srgbClr val="1A1A1A"/>
+                </a:solidFill>
+                <a:latin typeface="Georgia" pitchFamily="34" charset="0"/>
+                <a:ea typeface="Georgia" pitchFamily="34" charset="-122"/>
+                <a:cs typeface="Georgia" pitchFamily="34" charset="-120"/>
+              </a:rPr>
+              <a:t>Mats</a:t>
+            </a:r>
+            <a:endParaRPr lang="en-US" sz="1200" dirty="0"/>
+          </a:p>
+          <a:p>
+            <a:pPr algn="l" marL="342900" indent="-342900">
+              <a:lnSpc>
+                <a:spcPts val="1620"/>
+              </a:lnSpc>
+              <a:spcAft>
+                <a:spcPts val="300"/>
+              </a:spcAft>
+              <a:buSzPct val="100000"/>
+              <a:buChar char="•"/>
+            </a:pPr>
+            <a:r>
+              <a:rPr lang="en-US" sz="1200" dirty="0">
+                <a:solidFill>
+                  <a:srgbClr val="1A1A1A"/>
+                </a:solidFill>
+                <a:latin typeface="Georgia" pitchFamily="34" charset="0"/>
+                <a:ea typeface="Georgia" pitchFamily="34" charset="-122"/>
+                <a:cs typeface="Georgia" pitchFamily="34" charset="-120"/>
+              </a:rPr>
+              <a:t>Printed Porges (2009) or teacher synopsis (1–2 pages)</a:t>
+            </a:r>
+            <a:endParaRPr lang="en-US" sz="1200" dirty="0"/>
+          </a:p>
+          <a:p>
+            <a:pPr algn="l" marL="342900" indent="-342900">
+              <a:lnSpc>
+                <a:spcPts val="1620"/>
+              </a:lnSpc>
+              <a:spcAft>
+                <a:spcPts val="300"/>
+              </a:spcAft>
+              <a:buSzPct val="100000"/>
+              <a:buChar char="•"/>
+            </a:pPr>
+            <a:r>
+              <a:rPr lang="en-US" sz="1200" dirty="0">
+                <a:solidFill>
+                  <a:srgbClr val="1A1A1A"/>
+                </a:solidFill>
+                <a:latin typeface="Georgia" pitchFamily="34" charset="0"/>
+                <a:ea typeface="Georgia" pitchFamily="34" charset="-122"/>
+                <a:cs typeface="Georgia" pitchFamily="34" charset="-120"/>
+              </a:rPr>
+              <a:t>Diagram of three-tier ANS (ventral vagal / sympathetic / dorsal vagal)</a:t>
+            </a:r>
+            <a:endParaRPr lang="en-US" sz="1200" dirty="0"/>
+          </a:p>
+        </p:txBody>
+      </p:sp>
+      <p:sp>
+        <p:nvSpPr>
+          <p:cNvPr id="5" name="Text 3"/>
           <p:cNvSpPr/>
           <p:nvPr/>
         </p:nvSpPr>
@@ -3162,7 +4611,7 @@
                 <a:ea typeface="Times New Roman" pitchFamily="34" charset="-122"/>
                 <a:cs typeface="Times New Roman" pitchFamily="34" charset="-120"/>
               </a:rPr>
-              <a:t>Settle (3 min)</a:t>
+              <a:t>Flow</a:t>
             </a:r>
             <a:endParaRPr lang="en-US" sz="1800" dirty="0"/>
           </a:p>
@@ -3320,7 +4769,7 @@
                 <a:ea typeface="Times New Roman" pitchFamily="34" charset="-122"/>
                 <a:cs typeface="Times New Roman" pitchFamily="34" charset="-120"/>
               </a:rPr>
-              <a:t>Reading (15 min)</a:t>
+              <a:t>Settle (3 min)</a:t>
             </a:r>
             <a:endParaRPr lang="en-US" sz="1800" dirty="0"/>
           </a:p>
@@ -3329,54 +4778,6 @@
       <p:sp>
         <p:nvSpPr>
           <p:cNvPr id="4" name="Text 2"/>
-          <p:cNvSpPr/>
-          <p:nvPr/>
-        </p:nvSpPr>
-        <p:spPr>
-          <a:xfrm>
-            <a:off x="406301" y="870942"/>
-            <a:ext cx="8498026" cy="639812"/>
-          </a:xfrm>
-          <a:prstGeom prst="rect">
-            <a:avLst/>
-          </a:prstGeom>
-          <a:noFill/>
-          <a:ln/>
-        </p:spPr>
-        <p:txBody>
-          <a:bodyPr wrap="square" lIns="0" tIns="0" rIns="0" bIns="0" rtlCol="0" anchor="t"/>
-          <a:lstStyle/>
-          <a:p>
-            <a:pPr algn="l" indent="0" marL="0">
-              <a:lnSpc>
-                <a:spcPts val="1680"/>
-              </a:lnSpc>
-              <a:spcBef>
-                <a:spcPts val="300"/>
-              </a:spcBef>
-              <a:spcAft>
-                <a:spcPts val="300"/>
-              </a:spcAft>
-              <a:buNone/>
-            </a:pPr>
-            <a:r>
-              <a:rPr lang="en-US" sz="1200" dirty="0">
-                <a:solidFill>
-                  <a:srgbClr val="1A1A1A"/>
-                </a:solidFill>
-                <a:latin typeface="Georgia" pitchFamily="34" charset="0"/>
-                <a:ea typeface="Georgia" pitchFamily="34" charset="-122"/>
-                <a:cs typeface="Georgia" pitchFamily="34" charset="-120"/>
-              </a:rPr>
-              <a:t>– Silent read of Porges (2009) extract. – As they read, students note:   – The three-tier ANS framework   – What "ventral vagal" / "sympathetic" / "dorsal vagal" mean operationally   – How yoga practices (specifically breath + posture + interoception) might engage the ventral vagal complex   – One question they have</a:t>
-            </a:r>
-            <a:endParaRPr lang="en-US" sz="1200" dirty="0"/>
-          </a:p>
-        </p:txBody>
-      </p:sp>
-      <p:sp>
-        <p:nvSpPr>
-          <p:cNvPr id="5" name="Text 3"/>
           <p:cNvSpPr/>
           <p:nvPr/>
         </p:nvSpPr>
@@ -3526,7 +4927,7 @@
                 <a:ea typeface="Times New Roman" pitchFamily="34" charset="-122"/>
                 <a:cs typeface="Times New Roman" pitchFamily="34" charset="-120"/>
               </a:rPr>
-              <a:t>Core discussion (15 min)</a:t>
+              <a:t>Reading (15 min)</a:t>
             </a:r>
             <a:endParaRPr lang="en-US" sz="1800" dirty="0"/>
           </a:p>
@@ -3541,7 +4942,7 @@
         <p:spPr>
           <a:xfrm>
             <a:off x="634901" y="883593"/>
-            <a:ext cx="8102798" cy="281880"/>
+            <a:ext cx="8102798" cy="1500783"/>
           </a:xfrm>
           <a:prstGeom prst="rect">
             <a:avLst/>
@@ -3564,15 +4965,135 @@
               <a:buChar char="•"/>
             </a:pPr>
             <a:r>
-              <a:rPr lang="en-US" sz="1200" b="1" dirty="0">
-                <a:solidFill>
-                  <a:srgbClr val="1A1A1A"/>
-                </a:solidFill>
-                <a:latin typeface="Georgia" pitchFamily="34" charset="0"/>
-                <a:ea typeface="Georgia" pitchFamily="34" charset="-122"/>
-                <a:cs typeface="Georgia" pitchFamily="34" charset="-120"/>
-              </a:rPr>
-              <a:t>Build the three-tier picture on the board:</a:t>
+              <a:rPr lang="en-US" sz="1200" dirty="0">
+                <a:solidFill>
+                  <a:srgbClr val="1A1A1A"/>
+                </a:solidFill>
+                <a:latin typeface="Georgia" pitchFamily="34" charset="0"/>
+                <a:ea typeface="Georgia" pitchFamily="34" charset="-122"/>
+                <a:cs typeface="Georgia" pitchFamily="34" charset="-120"/>
+              </a:rPr>
+              <a:t>Silent read of Porges (2009) extract.</a:t>
+            </a:r>
+            <a:endParaRPr lang="en-US" sz="1200" dirty="0"/>
+          </a:p>
+          <a:p>
+            <a:pPr algn="l" marL="342900" indent="-342900">
+              <a:lnSpc>
+                <a:spcPts val="1620"/>
+              </a:lnSpc>
+              <a:spcAft>
+                <a:spcPts val="300"/>
+              </a:spcAft>
+              <a:buSzPct val="100000"/>
+              <a:buChar char="•"/>
+            </a:pPr>
+            <a:r>
+              <a:rPr lang="en-US" sz="1200" dirty="0">
+                <a:solidFill>
+                  <a:srgbClr val="1A1A1A"/>
+                </a:solidFill>
+                <a:latin typeface="Georgia" pitchFamily="34" charset="0"/>
+                <a:ea typeface="Georgia" pitchFamily="34" charset="-122"/>
+                <a:cs typeface="Georgia" pitchFamily="34" charset="-120"/>
+              </a:rPr>
+              <a:t>As they read, students note:</a:t>
+            </a:r>
+            <a:endParaRPr lang="en-US" sz="1200" dirty="0"/>
+          </a:p>
+          <a:p>
+            <a:pPr algn="l" marL="342900" indent="-342900">
+              <a:lnSpc>
+                <a:spcPts val="1620"/>
+              </a:lnSpc>
+              <a:spcAft>
+                <a:spcPts val="300"/>
+              </a:spcAft>
+              <a:buSzPct val="100000"/>
+              <a:buChar char="•"/>
+            </a:pPr>
+            <a:r>
+              <a:rPr lang="en-US" sz="1200" dirty="0">
+                <a:solidFill>
+                  <a:srgbClr val="1A1A1A"/>
+                </a:solidFill>
+                <a:latin typeface="Georgia" pitchFamily="34" charset="0"/>
+                <a:ea typeface="Georgia" pitchFamily="34" charset="-122"/>
+                <a:cs typeface="Georgia" pitchFamily="34" charset="-120"/>
+              </a:rPr>
+              <a:t>The three-tier ANS framework</a:t>
+            </a:r>
+            <a:endParaRPr lang="en-US" sz="1200" dirty="0"/>
+          </a:p>
+          <a:p>
+            <a:pPr algn="l" marL="342900" indent="-342900">
+              <a:lnSpc>
+                <a:spcPts val="1620"/>
+              </a:lnSpc>
+              <a:spcAft>
+                <a:spcPts val="300"/>
+              </a:spcAft>
+              <a:buSzPct val="100000"/>
+              <a:buChar char="•"/>
+            </a:pPr>
+            <a:r>
+              <a:rPr lang="en-US" sz="1200" dirty="0">
+                <a:solidFill>
+                  <a:srgbClr val="1A1A1A"/>
+                </a:solidFill>
+                <a:latin typeface="Georgia" pitchFamily="34" charset="0"/>
+                <a:ea typeface="Georgia" pitchFamily="34" charset="-122"/>
+                <a:cs typeface="Georgia" pitchFamily="34" charset="-120"/>
+              </a:rPr>
+              <a:t>What "ventral vagal" / "sympathetic" / "dorsal vagal" mean operationally</a:t>
+            </a:r>
+            <a:endParaRPr lang="en-US" sz="1200" dirty="0"/>
+          </a:p>
+          <a:p>
+            <a:pPr algn="l" marL="342900" indent="-342900">
+              <a:lnSpc>
+                <a:spcPts val="1620"/>
+              </a:lnSpc>
+              <a:spcAft>
+                <a:spcPts val="300"/>
+              </a:spcAft>
+              <a:buSzPct val="100000"/>
+              <a:buChar char="•"/>
+            </a:pPr>
+            <a:r>
+              <a:rPr lang="en-US" sz="1200" dirty="0">
+                <a:solidFill>
+                  <a:srgbClr val="1A1A1A"/>
+                </a:solidFill>
+                <a:latin typeface="Georgia" pitchFamily="34" charset="0"/>
+                <a:ea typeface="Georgia" pitchFamily="34" charset="-122"/>
+                <a:cs typeface="Georgia" pitchFamily="34" charset="-120"/>
+              </a:rPr>
+              <a:t>How yoga practices (specifically breath + posture + interoception) might engage the ventral vagal complex</a:t>
+            </a:r>
+            <a:endParaRPr lang="en-US" sz="1200" dirty="0"/>
+          </a:p>
+          <a:p>
+            <a:pPr algn="l" marL="342900" indent="-342900">
+              <a:lnSpc>
+                <a:spcPts val="1620"/>
+              </a:lnSpc>
+              <a:spcAft>
+                <a:spcPts val="300"/>
+              </a:spcAft>
+              <a:buSzPct val="100000"/>
+              <a:buChar char="•"/>
+            </a:pPr>
+            <a:r>
+              <a:rPr lang="en-US" sz="1200" dirty="0">
+                <a:solidFill>
+                  <a:srgbClr val="1A1A1A"/>
+                </a:solidFill>
+                <a:latin typeface="Georgia" pitchFamily="34" charset="0"/>
+                <a:ea typeface="Georgia" pitchFamily="34" charset="-122"/>
+                <a:cs typeface="Georgia" pitchFamily="34" charset="-120"/>
+              </a:rPr>
+              <a:t>One question they have</a:t>
             </a:r>
             <a:endParaRPr lang="en-US" sz="1200" dirty="0"/>
           </a:p>
@@ -3586,417 +5107,7 @@
         </p:nvSpPr>
         <p:spPr>
           <a:xfrm>
-            <a:off x="406301" y="1254323"/>
-            <a:ext cx="8498026" cy="213271"/>
-          </a:xfrm>
-          <a:prstGeom prst="rect">
-            <a:avLst/>
-          </a:prstGeom>
-          <a:noFill/>
-          <a:ln/>
-        </p:spPr>
-        <p:txBody>
-          <a:bodyPr wrap="square" lIns="0" tIns="0" rIns="0" bIns="0" rtlCol="0" anchor="t"/>
-          <a:lstStyle/>
-          <a:p>
-            <a:pPr algn="l" indent="0" marL="0">
-              <a:lnSpc>
-                <a:spcPts val="1680"/>
-              </a:lnSpc>
-              <a:spcBef>
-                <a:spcPts val="300"/>
-              </a:spcBef>
-              <a:spcAft>
-                <a:spcPts val="300"/>
-              </a:spcAft>
-              <a:buNone/>
-            </a:pPr>
-            <a:r>
-              <a:rPr lang="en-US" sz="1200" i="1" dirty="0">
-                <a:solidFill>
-                  <a:srgbClr val="1A1A1A"/>
-                </a:solidFill>
-                <a:latin typeface="Georgia" pitchFamily="34" charset="0"/>
-                <a:ea typeface="Georgia" pitchFamily="34" charset="-122"/>
-                <a:cs typeface="Georgia" pitchFamily="34" charset="-120"/>
-              </a:rPr>
-              <a:t>Each row: Tier · State · Behaviour · Heart rate.</a:t>
-            </a:r>
-            <a:endParaRPr lang="en-US" sz="1200" dirty="0"/>
-          </a:p>
-        </p:txBody>
-      </p:sp>
-      <p:sp>
-        <p:nvSpPr>
-          <p:cNvPr id="6" name="Text 4"/>
-          <p:cNvSpPr/>
-          <p:nvPr/>
-        </p:nvSpPr>
-        <p:spPr>
-          <a:xfrm>
-            <a:off x="634901" y="1556445"/>
-            <a:ext cx="8102798" cy="769441"/>
-          </a:xfrm>
-          <a:prstGeom prst="rect">
-            <a:avLst/>
-          </a:prstGeom>
-          <a:noFill/>
-          <a:ln/>
-        </p:spPr>
-        <p:txBody>
-          <a:bodyPr wrap="square" lIns="0" tIns="0" rIns="0" bIns="0" rtlCol="0" anchor="t"/>
-          <a:lstStyle/>
-          <a:p>
-            <a:pPr algn="l" marL="342900" indent="-342900">
-              <a:lnSpc>
-                <a:spcPts val="1620"/>
-              </a:lnSpc>
-              <a:spcAft>
-                <a:spcPts val="300"/>
-              </a:spcAft>
-              <a:buSzPct val="100000"/>
-              <a:buChar char="•"/>
-            </a:pPr>
-            <a:r>
-              <a:rPr lang="en-US" sz="1200" b="1" dirty="0">
-                <a:solidFill>
-                  <a:srgbClr val="1A1A1A"/>
-                </a:solidFill>
-                <a:latin typeface="Georgia" pitchFamily="34" charset="0"/>
-                <a:ea typeface="Georgia" pitchFamily="34" charset="-122"/>
-                <a:cs typeface="Georgia" pitchFamily="34" charset="-120"/>
-              </a:rPr>
-              <a:t>Ventral vagal</a:t>
-            </a:r>
-            <a:pPr algn="l" indent="0" marL="0">
-              <a:lnSpc>
-                <a:spcPts val="1620"/>
-              </a:lnSpc>
-              <a:spcAft>
-                <a:spcPts val="300"/>
-              </a:spcAft>
-              <a:buNone/>
-            </a:pPr>
-            <a:r>
-              <a:rPr lang="en-US" sz="1200" dirty="0">
-                <a:solidFill>
-                  <a:srgbClr val="1A1A1A"/>
-                </a:solidFill>
-                <a:latin typeface="Georgia" pitchFamily="34" charset="0"/>
-                <a:ea typeface="Georgia" pitchFamily="34" charset="-122"/>
-                <a:cs typeface="Georgia" pitchFamily="34" charset="-120"/>
-              </a:rPr>
-              <a:t> — Safe, social, connected · Calm engagement · Slow, variable (high HRV)</a:t>
-            </a:r>
-            <a:endParaRPr lang="en-US" sz="1200" dirty="0"/>
-          </a:p>
-          <a:p>
-            <a:pPr algn="l" marL="342900" indent="-342900">
-              <a:lnSpc>
-                <a:spcPts val="1620"/>
-              </a:lnSpc>
-              <a:spcAft>
-                <a:spcPts val="300"/>
-              </a:spcAft>
-              <a:buSzPct val="100000"/>
-              <a:buChar char="•"/>
-            </a:pPr>
-            <a:r>
-              <a:rPr lang="en-US" sz="1200" b="1" dirty="0">
-                <a:solidFill>
-                  <a:srgbClr val="1A1A1A"/>
-                </a:solidFill>
-                <a:latin typeface="Georgia" pitchFamily="34" charset="0"/>
-                <a:ea typeface="Georgia" pitchFamily="34" charset="-122"/>
-                <a:cs typeface="Georgia" pitchFamily="34" charset="-120"/>
-              </a:rPr>
-              <a:t>Sympathetic</a:t>
-            </a:r>
-            <a:pPr algn="l" indent="0" marL="0">
-              <a:lnSpc>
-                <a:spcPts val="1620"/>
-              </a:lnSpc>
-              <a:spcAft>
-                <a:spcPts val="300"/>
-              </a:spcAft>
-              <a:buNone/>
-            </a:pPr>
-            <a:r>
-              <a:rPr lang="en-US" sz="1200" dirty="0">
-                <a:solidFill>
-                  <a:srgbClr val="1A1A1A"/>
-                </a:solidFill>
-                <a:latin typeface="Georgia" pitchFamily="34" charset="0"/>
-                <a:ea typeface="Georgia" pitchFamily="34" charset="-122"/>
-                <a:cs typeface="Georgia" pitchFamily="34" charset="-120"/>
-              </a:rPr>
-              <a:t> — Mobilised, alert · Fight or flight · Fast, low HRV</a:t>
-            </a:r>
-            <a:endParaRPr lang="en-US" sz="1200" dirty="0"/>
-          </a:p>
-          <a:p>
-            <a:pPr algn="l" marL="342900" indent="-342900">
-              <a:lnSpc>
-                <a:spcPts val="1620"/>
-              </a:lnSpc>
-              <a:spcAft>
-                <a:spcPts val="300"/>
-              </a:spcAft>
-              <a:buSzPct val="100000"/>
-              <a:buChar char="•"/>
-            </a:pPr>
-            <a:r>
-              <a:rPr lang="en-US" sz="1200" b="1" dirty="0">
-                <a:solidFill>
-                  <a:srgbClr val="1A1A1A"/>
-                </a:solidFill>
-                <a:latin typeface="Georgia" pitchFamily="34" charset="0"/>
-                <a:ea typeface="Georgia" pitchFamily="34" charset="-122"/>
-                <a:cs typeface="Georgia" pitchFamily="34" charset="-120"/>
-              </a:rPr>
-              <a:t>Dorsal vagal</a:t>
-            </a:r>
-            <a:pPr algn="l" indent="0" marL="0">
-              <a:lnSpc>
-                <a:spcPts val="1620"/>
-              </a:lnSpc>
-              <a:spcAft>
-                <a:spcPts val="300"/>
-              </a:spcAft>
-              <a:buNone/>
-            </a:pPr>
-            <a:r>
-              <a:rPr lang="en-US" sz="1200" dirty="0">
-                <a:solidFill>
-                  <a:srgbClr val="1A1A1A"/>
-                </a:solidFill>
-                <a:latin typeface="Georgia" pitchFamily="34" charset="0"/>
-                <a:ea typeface="Georgia" pitchFamily="34" charset="-122"/>
-                <a:cs typeface="Georgia" pitchFamily="34" charset="-120"/>
-              </a:rPr>
-              <a:t> — Shutdown, conservation · Freeze, dissociation · Very slow</a:t>
-            </a:r>
-            <a:endParaRPr lang="en-US" sz="1200" dirty="0"/>
-          </a:p>
-        </p:txBody>
-      </p:sp>
-      <p:sp>
-        <p:nvSpPr>
-          <p:cNvPr id="7" name="Text 5"/>
-          <p:cNvSpPr/>
-          <p:nvPr/>
-        </p:nvSpPr>
-        <p:spPr>
-          <a:xfrm>
-            <a:off x="634901" y="2427387"/>
-            <a:ext cx="8102798" cy="281880"/>
-          </a:xfrm>
-          <a:prstGeom prst="rect">
-            <a:avLst/>
-          </a:prstGeom>
-          <a:noFill/>
-          <a:ln/>
-        </p:spPr>
-        <p:txBody>
-          <a:bodyPr wrap="square" lIns="0" tIns="0" rIns="0" bIns="0" rtlCol="0" anchor="t"/>
-          <a:lstStyle/>
-          <a:p>
-            <a:pPr algn="l" marL="342900" indent="-342900">
-              <a:lnSpc>
-                <a:spcPts val="1620"/>
-              </a:lnSpc>
-              <a:spcAft>
-                <a:spcPts val="300"/>
-              </a:spcAft>
-              <a:buSzPct val="100000"/>
-              <a:buChar char="•"/>
-            </a:pPr>
-            <a:r>
-              <a:rPr lang="en-US" sz="1200" b="1" dirty="0">
-                <a:solidFill>
-                  <a:srgbClr val="1A1A1A"/>
-                </a:solidFill>
-                <a:latin typeface="Georgia" pitchFamily="34" charset="0"/>
-                <a:ea typeface="Georgia" pitchFamily="34" charset="-122"/>
-                <a:cs typeface="Georgia" pitchFamily="34" charset="-120"/>
-              </a:rPr>
-              <a:t>Yoga's hypothesised effects</a:t>
-            </a:r>
-            <a:pPr algn="l" indent="0" marL="0">
-              <a:lnSpc>
-                <a:spcPts val="1620"/>
-              </a:lnSpc>
-              <a:spcAft>
-                <a:spcPts val="300"/>
-              </a:spcAft>
-              <a:buNone/>
-            </a:pPr>
-            <a:r>
-              <a:rPr lang="en-US" sz="1200" dirty="0">
-                <a:solidFill>
-                  <a:srgbClr val="1A1A1A"/>
-                </a:solidFill>
-                <a:latin typeface="Georgia" pitchFamily="34" charset="0"/>
-                <a:ea typeface="Georgia" pitchFamily="34" charset="-122"/>
-                <a:cs typeface="Georgia" pitchFamily="34" charset="-120"/>
-              </a:rPr>
-              <a:t> (per Porges and others):</a:t>
-            </a:r>
-            <a:endParaRPr lang="en-US" sz="1200" dirty="0"/>
-          </a:p>
-        </p:txBody>
-      </p:sp>
-      <p:sp>
-        <p:nvSpPr>
-          <p:cNvPr id="8" name="Text 6"/>
-          <p:cNvSpPr/>
-          <p:nvPr/>
-        </p:nvSpPr>
-        <p:spPr>
-          <a:xfrm>
-            <a:off x="406301" y="2798118"/>
-            <a:ext cx="8498026" cy="426541"/>
-          </a:xfrm>
-          <a:prstGeom prst="rect">
-            <a:avLst/>
-          </a:prstGeom>
-          <a:noFill/>
-          <a:ln/>
-        </p:spPr>
-        <p:txBody>
-          <a:bodyPr wrap="square" lIns="0" tIns="0" rIns="0" bIns="0" rtlCol="0" anchor="t"/>
-          <a:lstStyle/>
-          <a:p>
-            <a:pPr algn="l" indent="0" marL="0">
-              <a:lnSpc>
-                <a:spcPts val="1680"/>
-              </a:lnSpc>
-              <a:spcBef>
-                <a:spcPts val="300"/>
-              </a:spcBef>
-              <a:spcAft>
-                <a:spcPts val="300"/>
-              </a:spcAft>
-              <a:buNone/>
-            </a:pPr>
-            <a:r>
-              <a:rPr lang="en-US" sz="1200" dirty="0">
-                <a:solidFill>
-                  <a:srgbClr val="1A1A1A"/>
-                </a:solidFill>
-                <a:latin typeface="Georgia" pitchFamily="34" charset="0"/>
-                <a:ea typeface="Georgia" pitchFamily="34" charset="-122"/>
-                <a:cs typeface="Georgia" pitchFamily="34" charset="-120"/>
-              </a:rPr>
-              <a:t>– Slow exhalation → ventral vagal activation.    – Steady āsana practice → interoceptive awareness → ventral vagal.    – Group yoga practice → social engagement → ventral vagal.</a:t>
-            </a:r>
-            <a:endParaRPr lang="en-US" sz="1200" dirty="0"/>
-          </a:p>
-        </p:txBody>
-      </p:sp>
-      <p:sp>
-        <p:nvSpPr>
-          <p:cNvPr id="9" name="Text 7"/>
-          <p:cNvSpPr/>
-          <p:nvPr/>
-        </p:nvSpPr>
-        <p:spPr>
-          <a:xfrm>
-            <a:off x="634901" y="3313509"/>
-            <a:ext cx="8102798" cy="281880"/>
-          </a:xfrm>
-          <a:prstGeom prst="rect">
-            <a:avLst/>
-          </a:prstGeom>
-          <a:noFill/>
-          <a:ln/>
-        </p:spPr>
-        <p:txBody>
-          <a:bodyPr wrap="square" lIns="0" tIns="0" rIns="0" bIns="0" rtlCol="0" anchor="t"/>
-          <a:lstStyle/>
-          <a:p>
-            <a:pPr algn="l" marL="342900" indent="-342900">
-              <a:lnSpc>
-                <a:spcPts val="1620"/>
-              </a:lnSpc>
-              <a:spcAft>
-                <a:spcPts val="300"/>
-              </a:spcAft>
-              <a:buSzPct val="100000"/>
-              <a:buChar char="•"/>
-            </a:pPr>
-            <a:r>
-              <a:rPr lang="en-US" sz="1200" b="1" dirty="0">
-                <a:solidFill>
-                  <a:srgbClr val="1A1A1A"/>
-                </a:solidFill>
-                <a:latin typeface="Georgia" pitchFamily="34" charset="0"/>
-                <a:ea typeface="Georgia" pitchFamily="34" charset="-122"/>
-                <a:cs typeface="Georgia" pitchFamily="34" charset="-120"/>
-              </a:rPr>
-              <a:t>Limits and critiques.</a:t>
-            </a:r>
-            <a:endParaRPr lang="en-US" sz="1200" dirty="0"/>
-          </a:p>
-        </p:txBody>
-      </p:sp>
-      <p:sp>
-        <p:nvSpPr>
-          <p:cNvPr id="10" name="Text 8"/>
-          <p:cNvSpPr/>
-          <p:nvPr/>
-        </p:nvSpPr>
-        <p:spPr>
-          <a:xfrm>
-            <a:off x="406301" y="3684240"/>
-            <a:ext cx="8498026" cy="639812"/>
-          </a:xfrm>
-          <a:prstGeom prst="rect">
-            <a:avLst/>
-          </a:prstGeom>
-          <a:noFill/>
-          <a:ln/>
-        </p:spPr>
-        <p:txBody>
-          <a:bodyPr wrap="square" lIns="0" tIns="0" rIns="0" bIns="0" rtlCol="0" anchor="t"/>
-          <a:lstStyle/>
-          <a:p>
-            <a:pPr algn="l" indent="0" marL="0">
-              <a:lnSpc>
-                <a:spcPts val="1680"/>
-              </a:lnSpc>
-              <a:spcBef>
-                <a:spcPts val="300"/>
-              </a:spcBef>
-              <a:spcAft>
-                <a:spcPts val="300"/>
-              </a:spcAft>
-              <a:buNone/>
-            </a:pPr>
-            <a:r>
-              <a:rPr lang="en-US" sz="1200" dirty="0">
-                <a:solidFill>
-                  <a:srgbClr val="1A1A1A"/>
-                </a:solidFill>
-                <a:latin typeface="Georgia" pitchFamily="34" charset="0"/>
-                <a:ea typeface="Georgia" pitchFamily="34" charset="-122"/>
-                <a:cs typeface="Georgia" pitchFamily="34" charset="-120"/>
-              </a:rPr>
-              <a:t>– Porges's theory has critics — Grossman &amp; Taylor (2007) and others dispute specific claims about vagal physiology.    – The cleanest claim that survives: slow exhalation IS associated with parasympathetic activation (whether or not the polyvagal three-tier model is fully correct).</a:t>
-            </a:r>
-            <a:endParaRPr lang="en-US" sz="1200" dirty="0"/>
-          </a:p>
-        </p:txBody>
-      </p:sp>
-      <p:sp>
-        <p:nvSpPr>
-          <p:cNvPr id="11" name="Text 9"/>
-          <p:cNvSpPr/>
-          <p:nvPr/>
-        </p:nvSpPr>
-        <p:spPr>
-          <a:xfrm>
-            <a:off x="406301" y="4476452"/>
+            <a:off x="406301" y="4434929"/>
             <a:ext cx="8498026" cy="213271"/>
           </a:xfrm>
           <a:prstGeom prst="rect">
@@ -4140,7 +5251,7 @@
                 <a:ea typeface="Times New Roman" pitchFamily="34" charset="-122"/>
                 <a:cs typeface="Times New Roman" pitchFamily="34" charset="-120"/>
               </a:rPr>
-              <a:t>Practice (8 min) — Test the theory</a:t>
+              <a:t>Core discussion (15 min)</a:t>
             </a:r>
             <a:endParaRPr lang="en-US" sz="1800" dirty="0"/>
           </a:p>
@@ -4154,8 +5265,8 @@
         </p:nvSpPr>
         <p:spPr>
           <a:xfrm>
-            <a:off x="406301" y="870942"/>
-            <a:ext cx="8498026" cy="426541"/>
+            <a:off x="634901" y="883593"/>
+            <a:ext cx="8102798" cy="281880"/>
           </a:xfrm>
           <a:prstGeom prst="rect">
             <a:avLst/>
@@ -4167,28 +5278,26 @@
           <a:bodyPr wrap="square" lIns="0" tIns="0" rIns="0" bIns="0" rtlCol="0" anchor="t"/>
           <a:lstStyle/>
           <a:p>
-            <a:pPr algn="l" indent="0" marL="0">
-              <a:lnSpc>
-                <a:spcPts val="1680"/>
-              </a:lnSpc>
-              <a:spcBef>
-                <a:spcPts val="300"/>
-              </a:spcBef>
-              <a:spcAft>
-                <a:spcPts val="300"/>
-              </a:spcAft>
-              <a:buNone/>
-            </a:pPr>
-            <a:r>
-              <a:rPr lang="en-US" sz="1200" dirty="0">
-                <a:solidFill>
-                  <a:srgbClr val="1A1A1A"/>
-                </a:solidFill>
-                <a:latin typeface="Georgia" pitchFamily="34" charset="0"/>
-                <a:ea typeface="Georgia" pitchFamily="34" charset="-122"/>
-                <a:cs typeface="Georgia" pitchFamily="34" charset="-120"/>
-              </a:rPr>
-              <a:t>– 1 min sukhāsana, natural breath, count heart rate (carotid pulse if comfortable). – 5 min counted breath (4 in, 4 out). – 1 min sukhāsana, count heart rate again.</a:t>
+            <a:pPr algn="l" marL="342900" indent="-342900">
+              <a:lnSpc>
+                <a:spcPts val="1620"/>
+              </a:lnSpc>
+              <a:spcAft>
+                <a:spcPts val="300"/>
+              </a:spcAft>
+              <a:buSzPct val="100000"/>
+              <a:buChar char="•"/>
+            </a:pPr>
+            <a:r>
+              <a:rPr lang="en-US" sz="1200" b="1" dirty="0">
+                <a:solidFill>
+                  <a:srgbClr val="1A1A1A"/>
+                </a:solidFill>
+                <a:latin typeface="Georgia" pitchFamily="34" charset="0"/>
+                <a:ea typeface="Georgia" pitchFamily="34" charset="-122"/>
+                <a:cs typeface="Georgia" pitchFamily="34" charset="-120"/>
+              </a:rPr>
+              <a:t>Build the three-tier picture on the board:</a:t>
             </a:r>
             <a:endParaRPr lang="en-US" sz="1200" dirty="0"/>
           </a:p>
@@ -4202,8 +5311,8 @@
         </p:nvSpPr>
         <p:spPr>
           <a:xfrm>
-            <a:off x="406301" y="1373684"/>
-            <a:ext cx="8498026" cy="426541"/>
+            <a:off x="406301" y="1254323"/>
+            <a:ext cx="8498026" cy="213271"/>
           </a:xfrm>
           <a:prstGeom prst="rect">
             <a:avLst/>
@@ -4228,29 +5337,6 @@
               <a:buNone/>
             </a:pPr>
             <a:r>
-              <a:rPr lang="en-US" sz="1200" dirty="0">
-                <a:solidFill>
-                  <a:srgbClr val="1A1A1A"/>
-                </a:solidFill>
-                <a:latin typeface="Georgia" pitchFamily="34" charset="0"/>
-                <a:ea typeface="Georgia" pitchFamily="34" charset="-122"/>
-                <a:cs typeface="Georgia" pitchFamily="34" charset="-120"/>
-              </a:rPr>
-              <a:t>Did anything change? (Most students notice a slight slowing. The N=1 anecdote doesn't prove anything, but it lets students </a:t>
-            </a:r>
-            <a:pPr algn="l" indent="0" marL="0">
-              <a:lnSpc>
-                <a:spcPts val="1680"/>
-              </a:lnSpc>
-              <a:spcBef>
-                <a:spcPts val="300"/>
-              </a:spcBef>
-              <a:spcAft>
-                <a:spcPts val="300"/>
-              </a:spcAft>
-              <a:buNone/>
-            </a:pPr>
-            <a:r>
               <a:rPr lang="en-US" sz="1200" i="1" dirty="0">
                 <a:solidFill>
                   <a:srgbClr val="1A1A1A"/>
@@ -4259,30 +5345,7 @@
                 <a:ea typeface="Georgia" pitchFamily="34" charset="-122"/>
                 <a:cs typeface="Georgia" pitchFamily="34" charset="-120"/>
               </a:rPr>
-              <a:t>feel</a:t>
-            </a:r>
-            <a:pPr algn="l" indent="0" marL="0">
-              <a:lnSpc>
-                <a:spcPts val="1680"/>
-              </a:lnSpc>
-              <a:spcBef>
-                <a:spcPts val="300"/>
-              </a:spcBef>
-              <a:spcAft>
-                <a:spcPts val="300"/>
-              </a:spcAft>
-              <a:buNone/>
-            </a:pPr>
-            <a:r>
-              <a:rPr lang="en-US" sz="1200" dirty="0">
-                <a:solidFill>
-                  <a:srgbClr val="1A1A1A"/>
-                </a:solidFill>
-                <a:latin typeface="Georgia" pitchFamily="34" charset="0"/>
-                <a:ea typeface="Georgia" pitchFamily="34" charset="-122"/>
-                <a:cs typeface="Georgia" pitchFamily="34" charset="-120"/>
-              </a:rPr>
-              <a:t> the principle.)</a:t>
+              <a:t>Each row: Tier · State · Behaviour · Heart rate.</a:t>
             </a:r>
             <a:endParaRPr lang="en-US" sz="1200" dirty="0"/>
           </a:p>
@@ -4440,7 +5503,7 @@
                 <a:ea typeface="Times New Roman" pitchFamily="34" charset="-122"/>
                 <a:cs typeface="Times New Roman" pitchFamily="34" charset="-120"/>
               </a:rPr>
-              <a:t>Wrap-up (4 min)</a:t>
+              <a:t>Core discussion (15 min) (cont.)</a:t>
             </a:r>
             <a:endParaRPr lang="en-US" sz="1800" dirty="0"/>
           </a:p>
@@ -4454,8 +5517,8 @@
         </p:nvSpPr>
         <p:spPr>
           <a:xfrm>
-            <a:off x="406301" y="870942"/>
-            <a:ext cx="8498026" cy="426541"/>
+            <a:off x="634901" y="883593"/>
+            <a:ext cx="8102798" cy="769441"/>
           </a:xfrm>
           <a:prstGeom prst="rect">
             <a:avLst/>
@@ -4467,13 +5530,31 @@
           <a:bodyPr wrap="square" lIns="0" tIns="0" rIns="0" bIns="0" rtlCol="0" anchor="t"/>
           <a:lstStyle/>
           <a:p>
+            <a:pPr algn="l" marL="342900" indent="-342900">
+              <a:lnSpc>
+                <a:spcPts val="1620"/>
+              </a:lnSpc>
+              <a:spcAft>
+                <a:spcPts val="300"/>
+              </a:spcAft>
+              <a:buSzPct val="100000"/>
+              <a:buChar char="•"/>
+            </a:pPr>
+            <a:r>
+              <a:rPr lang="en-US" sz="1200" b="1" dirty="0">
+                <a:solidFill>
+                  <a:srgbClr val="1A1A1A"/>
+                </a:solidFill>
+                <a:latin typeface="Georgia" pitchFamily="34" charset="0"/>
+                <a:ea typeface="Georgia" pitchFamily="34" charset="-122"/>
+                <a:cs typeface="Georgia" pitchFamily="34" charset="-120"/>
+              </a:rPr>
+              <a:t>Ventral vagal</a:t>
+            </a:r>
             <a:pPr algn="l" indent="0" marL="0">
               <a:lnSpc>
-                <a:spcPts val="1680"/>
-              </a:lnSpc>
-              <a:spcBef>
-                <a:spcPts val="300"/>
-              </a:spcBef>
+                <a:spcPts val="1620"/>
+              </a:lnSpc>
               <a:spcAft>
                 <a:spcPts val="300"/>
               </a:spcAft>
@@ -4488,30 +5569,95 @@
                 <a:ea typeface="Georgia" pitchFamily="34" charset="-122"/>
                 <a:cs typeface="Georgia" pitchFamily="34" charset="-120"/>
               </a:rPr>
-              <a:t>– 2 students share their question from the reading. – Preview Day 7: </a:t>
+              <a:t> — Safe, social, connected · Calm engagement · Slow, variable (high HRV)</a:t>
+            </a:r>
+            <a:endParaRPr lang="en-US" sz="1200" dirty="0"/>
+          </a:p>
+          <a:p>
+            <a:pPr algn="l" marL="342900" indent="-342900">
+              <a:lnSpc>
+                <a:spcPts val="1620"/>
+              </a:lnSpc>
+              <a:spcAft>
+                <a:spcPts val="300"/>
+              </a:spcAft>
+              <a:buSzPct val="100000"/>
+              <a:buChar char="•"/>
+            </a:pPr>
+            <a:r>
+              <a:rPr lang="en-US" sz="1200" b="1" dirty="0">
+                <a:solidFill>
+                  <a:srgbClr val="1A1A1A"/>
+                </a:solidFill>
+                <a:latin typeface="Georgia" pitchFamily="34" charset="0"/>
+                <a:ea typeface="Georgia" pitchFamily="34" charset="-122"/>
+                <a:cs typeface="Georgia" pitchFamily="34" charset="-120"/>
+              </a:rPr>
+              <a:t>Sympathetic</a:t>
             </a:r>
             <a:pPr algn="l" indent="0" marL="0">
               <a:lnSpc>
-                <a:spcPts val="1680"/>
-              </a:lnSpc>
-              <a:spcBef>
-                <a:spcPts val="300"/>
-              </a:spcBef>
-              <a:spcAft>
-                <a:spcPts val="300"/>
-              </a:spcAft>
-              <a:buNone/>
-            </a:pPr>
-            <a:r>
-              <a:rPr lang="en-US" sz="1200" i="1" dirty="0">
-                <a:solidFill>
-                  <a:srgbClr val="1A1A1A"/>
-                </a:solidFill>
-                <a:latin typeface="Georgia" pitchFamily="34" charset="0"/>
-                <a:ea typeface="Georgia" pitchFamily="34" charset="-122"/>
-                <a:cs typeface="Georgia" pitchFamily="34" charset="-120"/>
-              </a:rPr>
-              <a:t>"Tomorrow — modern postural yoga's specific 20th-century lineage."</a:t>
+                <a:spcPts val="1620"/>
+              </a:lnSpc>
+              <a:spcAft>
+                <a:spcPts val="300"/>
+              </a:spcAft>
+              <a:buNone/>
+            </a:pPr>
+            <a:r>
+              <a:rPr lang="en-US" sz="1200" dirty="0">
+                <a:solidFill>
+                  <a:srgbClr val="1A1A1A"/>
+                </a:solidFill>
+                <a:latin typeface="Georgia" pitchFamily="34" charset="0"/>
+                <a:ea typeface="Georgia" pitchFamily="34" charset="-122"/>
+                <a:cs typeface="Georgia" pitchFamily="34" charset="-120"/>
+              </a:rPr>
+              <a:t> — Mobilised, alert · Fight or flight · Fast, low HRV</a:t>
+            </a:r>
+            <a:endParaRPr lang="en-US" sz="1200" dirty="0"/>
+          </a:p>
+          <a:p>
+            <a:pPr algn="l" marL="342900" indent="-342900">
+              <a:lnSpc>
+                <a:spcPts val="1620"/>
+              </a:lnSpc>
+              <a:spcAft>
+                <a:spcPts val="300"/>
+              </a:spcAft>
+              <a:buSzPct val="100000"/>
+              <a:buChar char="•"/>
+            </a:pPr>
+            <a:r>
+              <a:rPr lang="en-US" sz="1200" b="1" dirty="0">
+                <a:solidFill>
+                  <a:srgbClr val="1A1A1A"/>
+                </a:solidFill>
+                <a:latin typeface="Georgia" pitchFamily="34" charset="0"/>
+                <a:ea typeface="Georgia" pitchFamily="34" charset="-122"/>
+                <a:cs typeface="Georgia" pitchFamily="34" charset="-120"/>
+              </a:rPr>
+              <a:t>Dorsal vagal</a:t>
+            </a:r>
+            <a:pPr algn="l" indent="0" marL="0">
+              <a:lnSpc>
+                <a:spcPts val="1620"/>
+              </a:lnSpc>
+              <a:spcAft>
+                <a:spcPts val="300"/>
+              </a:spcAft>
+              <a:buNone/>
+            </a:pPr>
+            <a:r>
+              <a:rPr lang="en-US" sz="1200" dirty="0">
+                <a:solidFill>
+                  <a:srgbClr val="1A1A1A"/>
+                </a:solidFill>
+                <a:latin typeface="Georgia" pitchFamily="34" charset="0"/>
+                <a:ea typeface="Georgia" pitchFamily="34" charset="-122"/>
+                <a:cs typeface="Georgia" pitchFamily="34" charset="-120"/>
+              </a:rPr>
+              <a:t> — Shutdown, conservation · Freeze, dissociation · Very slow</a:t>
             </a:r>
             <a:endParaRPr lang="en-US" sz="1200" dirty="0"/>
           </a:p>
@@ -4669,7 +5815,7 @@
                 <a:ea typeface="Times New Roman" pitchFamily="34" charset="-122"/>
                 <a:cs typeface="Times New Roman" pitchFamily="34" charset="-120"/>
               </a:rPr>
-              <a:t>Differentiation</a:t>
+              <a:t>Core discussion (15 min) (cont.)</a:t>
             </a:r>
             <a:endParaRPr lang="en-US" sz="1800" dirty="0"/>
           </a:p>
@@ -4684,7 +5830,7 @@
         <p:spPr>
           <a:xfrm>
             <a:off x="634901" y="883593"/>
-            <a:ext cx="8102798" cy="525661"/>
+            <a:ext cx="8102798" cy="281880"/>
           </a:xfrm>
           <a:prstGeom prst="rect">
             <a:avLst/>
@@ -4715,7 +5861,7 @@
                 <a:ea typeface="Georgia" pitchFamily="34" charset="-122"/>
                 <a:cs typeface="Georgia" pitchFamily="34" charset="-120"/>
               </a:rPr>
-              <a:t>Tier up:</a:t>
+              <a:t>Yoga's hypothesised effects</a:t>
             </a:r>
             <a:pPr algn="l" indent="0" marL="0">
               <a:lnSpc>
@@ -4735,10 +5881,32 @@
                 <a:ea typeface="Georgia" pitchFamily="34" charset="-122"/>
                 <a:cs typeface="Georgia" pitchFamily="34" charset="-120"/>
               </a:rPr>
-              <a:t> Read the Grossman &amp; Taylor (2007) critique. Bring 1 specific objection to discuss.</a:t>
+              <a:t> (per Porges and others):</a:t>
             </a:r>
             <a:endParaRPr lang="en-US" sz="1200" dirty="0"/>
           </a:p>
+        </p:txBody>
+      </p:sp>
+      <p:sp>
+        <p:nvSpPr>
+          <p:cNvPr id="5" name="Text 3"/>
+          <p:cNvSpPr/>
+          <p:nvPr/>
+        </p:nvSpPr>
+        <p:spPr>
+          <a:xfrm>
+            <a:off x="634901" y="1266974"/>
+            <a:ext cx="8102798" cy="769441"/>
+          </a:xfrm>
+          <a:prstGeom prst="rect">
+            <a:avLst/>
+          </a:prstGeom>
+          <a:noFill/>
+          <a:ln/>
+        </p:spPr>
+        <p:txBody>
+          <a:bodyPr wrap="square" lIns="0" tIns="0" rIns="0" bIns="0" rtlCol="0" anchor="t"/>
+          <a:lstStyle/>
           <a:p>
             <a:pPr algn="l" marL="342900" indent="-342900">
               <a:lnSpc>
@@ -4751,24 +5919,28 @@
               <a:buChar char="•"/>
             </a:pPr>
             <a:r>
-              <a:rPr lang="en-US" sz="1200" b="1" dirty="0">
-                <a:solidFill>
-                  <a:srgbClr val="1A1A1A"/>
-                </a:solidFill>
-                <a:latin typeface="Georgia" pitchFamily="34" charset="0"/>
-                <a:ea typeface="Georgia" pitchFamily="34" charset="-122"/>
-                <a:cs typeface="Georgia" pitchFamily="34" charset="-120"/>
-              </a:rPr>
-              <a:t>Tier down:</a:t>
-            </a:r>
-            <a:pPr algn="l" indent="0" marL="0">
+              <a:rPr lang="en-US" sz="1200" dirty="0">
+                <a:solidFill>
+                  <a:srgbClr val="1A1A1A"/>
+                </a:solidFill>
+                <a:latin typeface="Georgia" pitchFamily="34" charset="0"/>
+                <a:ea typeface="Georgia" pitchFamily="34" charset="-122"/>
+                <a:cs typeface="Georgia" pitchFamily="34" charset="-120"/>
+              </a:rPr>
+              <a:t>Slow exhalation → ventral vagal activation.</a:t>
+            </a:r>
+            <a:endParaRPr lang="en-US" sz="1200" dirty="0"/>
+          </a:p>
+          <a:p>
+            <a:pPr algn="l" marL="342900" indent="-342900">
               <a:lnSpc>
                 <a:spcPts val="1620"/>
               </a:lnSpc>
               <a:spcAft>
                 <a:spcPts val="300"/>
               </a:spcAft>
-              <a:buNone/>
+              <a:buSzPct val="100000"/>
+              <a:buChar char="•"/>
             </a:pPr>
             <a:r>
               <a:rPr lang="en-US" sz="1200" dirty="0">
@@ -4779,15 +5951,39 @@
                 <a:ea typeface="Georgia" pitchFamily="34" charset="-122"/>
                 <a:cs typeface="Georgia" pitchFamily="34" charset="-120"/>
               </a:rPr>
-              <a:t> Focus on the three-tier ANS framework; the polyvagal extensions can be supplementary.</a:t>
+              <a:t>Steady āsana practice → interoceptive awareness → ventral vagal.</a:t>
             </a:r>
             <a:endParaRPr lang="en-US" sz="1200" dirty="0"/>
           </a:p>
-        </p:txBody>
-      </p:sp>
-      <p:sp>
-        <p:nvSpPr>
-          <p:cNvPr id="5" name="Text 3"/>
+          <a:p>
+            <a:pPr algn="l" marL="342900" indent="-342900">
+              <a:lnSpc>
+                <a:spcPts val="1620"/>
+              </a:lnSpc>
+              <a:spcAft>
+                <a:spcPts val="300"/>
+              </a:spcAft>
+              <a:buSzPct val="100000"/>
+              <a:buChar char="•"/>
+            </a:pPr>
+            <a:r>
+              <a:rPr lang="en-US" sz="1200" dirty="0">
+                <a:solidFill>
+                  <a:srgbClr val="1A1A1A"/>
+                </a:solidFill>
+                <a:latin typeface="Georgia" pitchFamily="34" charset="0"/>
+                <a:ea typeface="Georgia" pitchFamily="34" charset="-122"/>
+                <a:cs typeface="Georgia" pitchFamily="34" charset="-120"/>
+              </a:rPr>
+              <a:t>Group yoga practice → social engagement → ventral vagal.</a:t>
+            </a:r>
+            <a:endParaRPr lang="en-US" sz="1200" dirty="0"/>
+          </a:p>
+        </p:txBody>
+      </p:sp>
+      <p:sp>
+        <p:nvSpPr>
+          <p:cNvPr id="6" name="Text 4"/>
           <p:cNvSpPr/>
           <p:nvPr/>
         </p:nvSpPr>
